--- a/docs/LuckyServer.pptx
+++ b/docs/LuckyServer.pptx
@@ -11,6 +11,9 @@
     <p:sldId id="259" r:id="rId5"/>
     <p:sldId id="260" r:id="rId6"/>
     <p:sldId id="261" r:id="rId7"/>
+    <p:sldId id="265" r:id="rId8"/>
+    <p:sldId id="263" r:id="rId9"/>
+    <p:sldId id="264" r:id="rId10"/>
   </p:sldIdLst>
   <p:sldSz cx="12192000" cy="6858000"/>
   <p:notesSz cx="6858000" cy="9144000"/>
@@ -264,7 +267,7 @@
           <a:p>
             <a:fld id="{578C14AD-157C-4B19-B926-4C213759CBF9}" type="datetimeFigureOut">
               <a:rPr lang="zh-CN" altLang="en-US" smtClean="0"/>
-              <a:t>2024/10/19</a:t>
+              <a:t>2024-10-19</a:t>
             </a:fld>
             <a:endParaRPr lang="zh-CN" altLang="en-US"/>
           </a:p>
@@ -462,7 +465,7 @@
           <a:p>
             <a:fld id="{578C14AD-157C-4B19-B926-4C213759CBF9}" type="datetimeFigureOut">
               <a:rPr lang="zh-CN" altLang="en-US" smtClean="0"/>
-              <a:t>2024/10/19</a:t>
+              <a:t>2024-10-19</a:t>
             </a:fld>
             <a:endParaRPr lang="zh-CN" altLang="en-US"/>
           </a:p>
@@ -670,7 +673,7 @@
           <a:p>
             <a:fld id="{578C14AD-157C-4B19-B926-4C213759CBF9}" type="datetimeFigureOut">
               <a:rPr lang="zh-CN" altLang="en-US" smtClean="0"/>
-              <a:t>2024/10/19</a:t>
+              <a:t>2024-10-19</a:t>
             </a:fld>
             <a:endParaRPr lang="zh-CN" altLang="en-US"/>
           </a:p>
@@ -868,7 +871,7 @@
           <a:p>
             <a:fld id="{578C14AD-157C-4B19-B926-4C213759CBF9}" type="datetimeFigureOut">
               <a:rPr lang="zh-CN" altLang="en-US" smtClean="0"/>
-              <a:t>2024/10/19</a:t>
+              <a:t>2024-10-19</a:t>
             </a:fld>
             <a:endParaRPr lang="zh-CN" altLang="en-US"/>
           </a:p>
@@ -1143,7 +1146,7 @@
           <a:p>
             <a:fld id="{578C14AD-157C-4B19-B926-4C213759CBF9}" type="datetimeFigureOut">
               <a:rPr lang="zh-CN" altLang="en-US" smtClean="0"/>
-              <a:t>2024/10/19</a:t>
+              <a:t>2024-10-19</a:t>
             </a:fld>
             <a:endParaRPr lang="zh-CN" altLang="en-US"/>
           </a:p>
@@ -1408,7 +1411,7 @@
           <a:p>
             <a:fld id="{578C14AD-157C-4B19-B926-4C213759CBF9}" type="datetimeFigureOut">
               <a:rPr lang="zh-CN" altLang="en-US" smtClean="0"/>
-              <a:t>2024/10/19</a:t>
+              <a:t>2024-10-19</a:t>
             </a:fld>
             <a:endParaRPr lang="zh-CN" altLang="en-US"/>
           </a:p>
@@ -1820,7 +1823,7 @@
           <a:p>
             <a:fld id="{578C14AD-157C-4B19-B926-4C213759CBF9}" type="datetimeFigureOut">
               <a:rPr lang="zh-CN" altLang="en-US" smtClean="0"/>
-              <a:t>2024/10/19</a:t>
+              <a:t>2024-10-19</a:t>
             </a:fld>
             <a:endParaRPr lang="zh-CN" altLang="en-US"/>
           </a:p>
@@ -1961,7 +1964,7 @@
           <a:p>
             <a:fld id="{578C14AD-157C-4B19-B926-4C213759CBF9}" type="datetimeFigureOut">
               <a:rPr lang="zh-CN" altLang="en-US" smtClean="0"/>
-              <a:t>2024/10/19</a:t>
+              <a:t>2024-10-19</a:t>
             </a:fld>
             <a:endParaRPr lang="zh-CN" altLang="en-US"/>
           </a:p>
@@ -2074,7 +2077,7 @@
           <a:p>
             <a:fld id="{578C14AD-157C-4B19-B926-4C213759CBF9}" type="datetimeFigureOut">
               <a:rPr lang="zh-CN" altLang="en-US" smtClean="0"/>
-              <a:t>2024/10/19</a:t>
+              <a:t>2024-10-19</a:t>
             </a:fld>
             <a:endParaRPr lang="zh-CN" altLang="en-US"/>
           </a:p>
@@ -2385,7 +2388,7 @@
           <a:p>
             <a:fld id="{578C14AD-157C-4B19-B926-4C213759CBF9}" type="datetimeFigureOut">
               <a:rPr lang="zh-CN" altLang="en-US" smtClean="0"/>
-              <a:t>2024/10/19</a:t>
+              <a:t>2024-10-19</a:t>
             </a:fld>
             <a:endParaRPr lang="zh-CN" altLang="en-US"/>
           </a:p>
@@ -2673,7 +2676,7 @@
           <a:p>
             <a:fld id="{578C14AD-157C-4B19-B926-4C213759CBF9}" type="datetimeFigureOut">
               <a:rPr lang="zh-CN" altLang="en-US" smtClean="0"/>
-              <a:t>2024/10/19</a:t>
+              <a:t>2024-10-19</a:t>
             </a:fld>
             <a:endParaRPr lang="zh-CN" altLang="en-US"/>
           </a:p>
@@ -2914,7 +2917,7 @@
           <a:p>
             <a:fld id="{578C14AD-157C-4B19-B926-4C213759CBF9}" type="datetimeFigureOut">
               <a:rPr lang="zh-CN" altLang="en-US" smtClean="0"/>
-              <a:t>2024/10/19</a:t>
+              <a:t>2024-10-19</a:t>
             </a:fld>
             <a:endParaRPr lang="zh-CN" altLang="en-US"/>
           </a:p>
@@ -6651,6 +6654,601 @@
 </p:sld>
 </file>
 
+<file path=ppt/slides/slide7.xml><?xml version="1.0" encoding="utf-8"?>
+<p:sld xmlns:a="http://schemas.openxmlformats.org/drawingml/2006/main" xmlns:r="http://schemas.openxmlformats.org/officeDocument/2006/relationships" xmlns:p="http://schemas.openxmlformats.org/presentationml/2006/main">
+  <p:cSld>
+    <p:spTree>
+      <p:nvGrpSpPr>
+        <p:cNvPr id="1" name="">
+          <a:extLst>
+            <a:ext uri="{FF2B5EF4-FFF2-40B4-BE49-F238E27FC236}">
+              <a16:creationId xmlns:a16="http://schemas.microsoft.com/office/drawing/2014/main" id="{9D6EC837-7D92-5E3B-9E37-0551E274E106}"/>
+            </a:ext>
+          </a:extLst>
+        </p:cNvPr>
+        <p:cNvGrpSpPr/>
+        <p:nvPr/>
+      </p:nvGrpSpPr>
+      <p:grpSpPr>
+        <a:xfrm>
+          <a:off x="0" y="0"/>
+          <a:ext cx="0" cy="0"/>
+          <a:chOff x="0" y="0"/>
+          <a:chExt cx="0" cy="0"/>
+        </a:xfrm>
+      </p:grpSpPr>
+      <p:sp>
+        <p:nvSpPr>
+          <p:cNvPr id="2" name="标题 1">
+            <a:extLst>
+              <a:ext uri="{FF2B5EF4-FFF2-40B4-BE49-F238E27FC236}">
+                <a16:creationId xmlns:a16="http://schemas.microsoft.com/office/drawing/2014/main" id="{CB6C0A98-F5E6-9532-24E2-F0C1EF59936F}"/>
+              </a:ext>
+            </a:extLst>
+          </p:cNvPr>
+          <p:cNvSpPr>
+            <a:spLocks noGrp="1"/>
+          </p:cNvSpPr>
+          <p:nvPr>
+            <p:ph type="title"/>
+          </p:nvPr>
+        </p:nvSpPr>
+        <p:spPr>
+          <a:xfrm>
+            <a:off x="838952" y="-142137"/>
+            <a:ext cx="10515600" cy="1325563"/>
+          </a:xfrm>
+        </p:spPr>
+        <p:txBody>
+          <a:bodyPr/>
+          <a:lstStyle/>
+          <a:p>
+            <a:r>
+              <a:rPr lang="en-US" altLang="zh-CN" b="1" dirty="0">
+                <a:latin typeface="方正大标宋简体" panose="02010601030101010101" pitchFamily="2" charset="-122"/>
+                <a:ea typeface="方正大标宋简体" panose="02010601030101010101" pitchFamily="2" charset="-122"/>
+              </a:rPr>
+              <a:t>Project Progress Management</a:t>
+            </a:r>
+            <a:endParaRPr lang="zh-CN" altLang="en-US" sz="4000" b="1" dirty="0">
+              <a:ea typeface="方正大标宋简体" panose="02010601030101010101" pitchFamily="2" charset="-122"/>
+            </a:endParaRPr>
+          </a:p>
+        </p:txBody>
+      </p:sp>
+      <p:sp>
+        <p:nvSpPr>
+          <p:cNvPr id="3" name="内容占位符 2">
+            <a:extLst>
+              <a:ext uri="{FF2B5EF4-FFF2-40B4-BE49-F238E27FC236}">
+                <a16:creationId xmlns:a16="http://schemas.microsoft.com/office/drawing/2014/main" id="{44798EC1-CD57-E6A2-A348-B87170AF78F4}"/>
+              </a:ext>
+            </a:extLst>
+          </p:cNvPr>
+          <p:cNvSpPr>
+            <a:spLocks noGrp="1"/>
+          </p:cNvSpPr>
+          <p:nvPr>
+            <p:ph idx="1"/>
+          </p:nvPr>
+        </p:nvSpPr>
+        <p:spPr>
+          <a:xfrm>
+            <a:off x="893292" y="945264"/>
+            <a:ext cx="10752117" cy="3637024"/>
+          </a:xfrm>
+        </p:spPr>
+        <p:txBody>
+          <a:bodyPr>
+            <a:noAutofit/>
+          </a:bodyPr>
+          <a:lstStyle/>
+          <a:p>
+            <a:pPr>
+              <a:lnSpc>
+                <a:spcPct val="150000"/>
+              </a:lnSpc>
+            </a:pPr>
+            <a:r>
+              <a:rPr lang="en-US" altLang="zh-CN" sz="3200" dirty="0">
+                <a:latin typeface="Times New Roman" panose="02020603050405020304" pitchFamily="18" charset="0"/>
+                <a:cs typeface="Times New Roman" panose="02020603050405020304" pitchFamily="18" charset="0"/>
+              </a:rPr>
+              <a:t>Managing Project Progress with </a:t>
+            </a:r>
+            <a:r>
+              <a:rPr lang="en-US" altLang="zh-CN" sz="3200" b="1" dirty="0">
+                <a:solidFill>
+                  <a:srgbClr val="009A9A"/>
+                </a:solidFill>
+                <a:latin typeface="Times New Roman" panose="02020603050405020304" pitchFamily="18" charset="0"/>
+                <a:cs typeface="Times New Roman" panose="02020603050405020304" pitchFamily="18" charset="0"/>
+              </a:rPr>
+              <a:t>Git</a:t>
+            </a:r>
+          </a:p>
+          <a:p>
+            <a:pPr lvl="1">
+              <a:lnSpc>
+                <a:spcPct val="150000"/>
+              </a:lnSpc>
+            </a:pPr>
+            <a:r>
+              <a:rPr lang="en-US" altLang="zh-CN" sz="2800" dirty="0">
+                <a:latin typeface="Times New Roman" panose="02020603050405020304" pitchFamily="18" charset="0"/>
+                <a:cs typeface="Times New Roman" panose="02020603050405020304" pitchFamily="18" charset="0"/>
+              </a:rPr>
+              <a:t>Tracking changes and commits</a:t>
+            </a:r>
+          </a:p>
+          <a:p>
+            <a:pPr lvl="1">
+              <a:lnSpc>
+                <a:spcPct val="150000"/>
+              </a:lnSpc>
+            </a:pPr>
+            <a:r>
+              <a:rPr lang="en-US" altLang="zh-CN" sz="2800" dirty="0">
+                <a:latin typeface="Times New Roman" panose="02020603050405020304" pitchFamily="18" charset="0"/>
+                <a:cs typeface="Times New Roman" panose="02020603050405020304" pitchFamily="18" charset="0"/>
+              </a:rPr>
+              <a:t>Branching and merging strategies</a:t>
+            </a:r>
+          </a:p>
+          <a:p>
+            <a:pPr lvl="1">
+              <a:lnSpc>
+                <a:spcPct val="150000"/>
+              </a:lnSpc>
+            </a:pPr>
+            <a:r>
+              <a:rPr lang="en-US" altLang="zh-CN" sz="2800" dirty="0">
+                <a:latin typeface="Times New Roman" panose="02020603050405020304" pitchFamily="18" charset="0"/>
+                <a:cs typeface="Times New Roman" panose="02020603050405020304" pitchFamily="18" charset="0"/>
+              </a:rPr>
+              <a:t>Collaborating with team members</a:t>
+            </a:r>
+          </a:p>
+          <a:p>
+            <a:pPr marL="457200" lvl="1" indent="0">
+              <a:lnSpc>
+                <a:spcPct val="150000"/>
+              </a:lnSpc>
+              <a:buNone/>
+            </a:pPr>
+            <a:r>
+              <a:rPr lang="en-US" altLang="zh-CN" sz="2800" dirty="0">
+                <a:latin typeface="Times New Roman" panose="02020603050405020304" pitchFamily="18" charset="0"/>
+                <a:cs typeface="Times New Roman" panose="02020603050405020304" pitchFamily="18" charset="0"/>
+              </a:rPr>
+              <a:t>   through pull requests</a:t>
+            </a:r>
+            <a:endParaRPr lang="zh-CN" altLang="en-US" sz="2800" dirty="0">
+              <a:latin typeface="Times New Roman" panose="02020603050405020304" pitchFamily="18" charset="0"/>
+              <a:cs typeface="Times New Roman" panose="02020603050405020304" pitchFamily="18" charset="0"/>
+            </a:endParaRPr>
+          </a:p>
+        </p:txBody>
+      </p:sp>
+      <p:pic>
+        <p:nvPicPr>
+          <p:cNvPr id="5" name="图片 4">
+            <a:extLst>
+              <a:ext uri="{FF2B5EF4-FFF2-40B4-BE49-F238E27FC236}">
+                <a16:creationId xmlns:a16="http://schemas.microsoft.com/office/drawing/2014/main" id="{5AAA5EBF-F1E9-4C27-5D87-5A3AA8B59C99}"/>
+              </a:ext>
+            </a:extLst>
+          </p:cNvPr>
+          <p:cNvPicPr>
+            <a:picLocks noChangeAspect="1"/>
+          </p:cNvPicPr>
+          <p:nvPr/>
+        </p:nvPicPr>
+        <p:blipFill>
+          <a:blip r:embed="rId2"/>
+          <a:stretch>
+            <a:fillRect/>
+          </a:stretch>
+        </p:blipFill>
+        <p:spPr>
+          <a:xfrm>
+            <a:off x="7578165" y="945264"/>
+            <a:ext cx="3465613" cy="5427834"/>
+          </a:xfrm>
+          <a:prstGeom prst="rect">
+            <a:avLst/>
+          </a:prstGeom>
+        </p:spPr>
+      </p:pic>
+    </p:spTree>
+    <p:extLst>
+      <p:ext uri="{BB962C8B-B14F-4D97-AF65-F5344CB8AC3E}">
+        <p14:creationId xmlns:p14="http://schemas.microsoft.com/office/powerpoint/2010/main" val="2609023843"/>
+      </p:ext>
+    </p:extLst>
+  </p:cSld>
+  <p:clrMapOvr>
+    <a:masterClrMapping/>
+  </p:clrMapOvr>
+</p:sld>
+</file>
+
+<file path=ppt/slides/slide8.xml><?xml version="1.0" encoding="utf-8"?>
+<p:sld xmlns:a="http://schemas.openxmlformats.org/drawingml/2006/main" xmlns:r="http://schemas.openxmlformats.org/officeDocument/2006/relationships" xmlns:p="http://schemas.openxmlformats.org/presentationml/2006/main">
+  <p:cSld>
+    <p:spTree>
+      <p:nvGrpSpPr>
+        <p:cNvPr id="1" name="">
+          <a:extLst>
+            <a:ext uri="{FF2B5EF4-FFF2-40B4-BE49-F238E27FC236}">
+              <a16:creationId xmlns:a16="http://schemas.microsoft.com/office/drawing/2014/main" id="{94ACB56B-B2CB-794D-64BC-2A76E2BBD2E5}"/>
+            </a:ext>
+          </a:extLst>
+        </p:cNvPr>
+        <p:cNvGrpSpPr/>
+        <p:nvPr/>
+      </p:nvGrpSpPr>
+      <p:grpSpPr>
+        <a:xfrm>
+          <a:off x="0" y="0"/>
+          <a:ext cx="0" cy="0"/>
+          <a:chOff x="0" y="0"/>
+          <a:chExt cx="0" cy="0"/>
+        </a:xfrm>
+      </p:grpSpPr>
+      <p:pic>
+        <p:nvPicPr>
+          <p:cNvPr id="26" name="图片 25">
+            <a:extLst>
+              <a:ext uri="{FF2B5EF4-FFF2-40B4-BE49-F238E27FC236}">
+                <a16:creationId xmlns:a16="http://schemas.microsoft.com/office/drawing/2014/main" id="{117262B2-ED73-82F1-0059-F2AF360E235C}"/>
+              </a:ext>
+            </a:extLst>
+          </p:cNvPr>
+          <p:cNvPicPr>
+            <a:picLocks noChangeAspect="1"/>
+          </p:cNvPicPr>
+          <p:nvPr/>
+        </p:nvPicPr>
+        <p:blipFill>
+          <a:blip r:embed="rId2"/>
+          <a:stretch>
+            <a:fillRect/>
+          </a:stretch>
+        </p:blipFill>
+        <p:spPr>
+          <a:xfrm>
+            <a:off x="988364" y="2527302"/>
+            <a:ext cx="6540309" cy="3637024"/>
+          </a:xfrm>
+          <a:prstGeom prst="rect">
+            <a:avLst/>
+          </a:prstGeom>
+        </p:spPr>
+      </p:pic>
+      <p:sp>
+        <p:nvSpPr>
+          <p:cNvPr id="2" name="标题 1">
+            <a:extLst>
+              <a:ext uri="{FF2B5EF4-FFF2-40B4-BE49-F238E27FC236}">
+                <a16:creationId xmlns:a16="http://schemas.microsoft.com/office/drawing/2014/main" id="{60899F4A-E104-FC45-5FE2-07AD8563649E}"/>
+              </a:ext>
+            </a:extLst>
+          </p:cNvPr>
+          <p:cNvSpPr>
+            <a:spLocks noGrp="1"/>
+          </p:cNvSpPr>
+          <p:nvPr>
+            <p:ph type="title"/>
+          </p:nvPr>
+        </p:nvSpPr>
+        <p:spPr>
+          <a:xfrm>
+            <a:off x="838952" y="-142137"/>
+            <a:ext cx="10515600" cy="1325563"/>
+          </a:xfrm>
+        </p:spPr>
+        <p:txBody>
+          <a:bodyPr/>
+          <a:lstStyle/>
+          <a:p>
+            <a:r>
+              <a:rPr lang="en-US" altLang="zh-CN" b="1" dirty="0">
+                <a:latin typeface="方正大标宋简体" panose="02010601030101010101" pitchFamily="2" charset="-122"/>
+                <a:ea typeface="方正大标宋简体" panose="02010601030101010101" pitchFamily="2" charset="-122"/>
+              </a:rPr>
+              <a:t>Code Review: </a:t>
+            </a:r>
+            <a:r>
+              <a:rPr lang="en-US" altLang="zh-CN" sz="4000" b="1" dirty="0">
+                <a:latin typeface="方正大标宋简体" panose="02010601030101010101" pitchFamily="2" charset="-122"/>
+                <a:ea typeface="方正大标宋简体" panose="02010601030101010101" pitchFamily="2" charset="-122"/>
+              </a:rPr>
+              <a:t>Google C++ Style Guide</a:t>
+            </a:r>
+            <a:endParaRPr lang="zh-CN" altLang="en-US" sz="4000" b="1" dirty="0">
+              <a:ea typeface="方正大标宋简体" panose="02010601030101010101" pitchFamily="2" charset="-122"/>
+            </a:endParaRPr>
+          </a:p>
+        </p:txBody>
+      </p:sp>
+      <p:sp>
+        <p:nvSpPr>
+          <p:cNvPr id="3" name="内容占位符 2">
+            <a:extLst>
+              <a:ext uri="{FF2B5EF4-FFF2-40B4-BE49-F238E27FC236}">
+                <a16:creationId xmlns:a16="http://schemas.microsoft.com/office/drawing/2014/main" id="{30F26D4B-7952-370A-39B5-CE28636F33B3}"/>
+              </a:ext>
+            </a:extLst>
+          </p:cNvPr>
+          <p:cNvSpPr>
+            <a:spLocks noGrp="1"/>
+          </p:cNvSpPr>
+          <p:nvPr>
+            <p:ph idx="1"/>
+          </p:nvPr>
+        </p:nvSpPr>
+        <p:spPr>
+          <a:xfrm>
+            <a:off x="893292" y="945264"/>
+            <a:ext cx="10752117" cy="3637024"/>
+          </a:xfrm>
+        </p:spPr>
+        <p:txBody>
+          <a:bodyPr/>
+          <a:lstStyle/>
+          <a:p>
+            <a:r>
+              <a:rPr lang="en-US" altLang="zh-CN" dirty="0">
+                <a:latin typeface="Times New Roman" panose="02020603050405020304" pitchFamily="18" charset="0"/>
+                <a:cs typeface="Times New Roman" panose="02020603050405020304" pitchFamily="18" charset="0"/>
+              </a:rPr>
+              <a:t>Header Files and Scoping</a:t>
+            </a:r>
+          </a:p>
+          <a:p>
+            <a:r>
+              <a:rPr lang="en-US" altLang="zh-CN" dirty="0">
+                <a:latin typeface="Times New Roman" panose="02020603050405020304" pitchFamily="18" charset="0"/>
+                <a:cs typeface="Times New Roman" panose="02020603050405020304" pitchFamily="18" charset="0"/>
+              </a:rPr>
+              <a:t>Class Design and Function Best Practices</a:t>
+            </a:r>
+          </a:p>
+          <a:p>
+            <a:r>
+              <a:rPr lang="en-US" altLang="zh-CN" dirty="0">
+                <a:latin typeface="Times New Roman" panose="02020603050405020304" pitchFamily="18" charset="0"/>
+                <a:cs typeface="Times New Roman" panose="02020603050405020304" pitchFamily="18" charset="0"/>
+              </a:rPr>
+              <a:t>Naming, Commenting, and Formatting Guidelines</a:t>
+            </a:r>
+            <a:endParaRPr lang="zh-CN" altLang="en-US" dirty="0">
+              <a:latin typeface="Times New Roman" panose="02020603050405020304" pitchFamily="18" charset="0"/>
+              <a:cs typeface="Times New Roman" panose="02020603050405020304" pitchFamily="18" charset="0"/>
+            </a:endParaRPr>
+          </a:p>
+        </p:txBody>
+      </p:sp>
+    </p:spTree>
+    <p:extLst>
+      <p:ext uri="{BB962C8B-B14F-4D97-AF65-F5344CB8AC3E}">
+        <p14:creationId xmlns:p14="http://schemas.microsoft.com/office/powerpoint/2010/main" val="76980153"/>
+      </p:ext>
+    </p:extLst>
+  </p:cSld>
+  <p:clrMapOvr>
+    <a:masterClrMapping/>
+  </p:clrMapOvr>
+</p:sld>
+</file>
+
+<file path=ppt/slides/slide9.xml><?xml version="1.0" encoding="utf-8"?>
+<p:sld xmlns:a="http://schemas.openxmlformats.org/drawingml/2006/main" xmlns:r="http://schemas.openxmlformats.org/officeDocument/2006/relationships" xmlns:p="http://schemas.openxmlformats.org/presentationml/2006/main">
+  <p:cSld>
+    <p:spTree>
+      <p:nvGrpSpPr>
+        <p:cNvPr id="1" name="">
+          <a:extLst>
+            <a:ext uri="{FF2B5EF4-FFF2-40B4-BE49-F238E27FC236}">
+              <a16:creationId xmlns:a16="http://schemas.microsoft.com/office/drawing/2014/main" id="{3D3021CA-2B1C-55EC-471F-1305B5E79685}"/>
+            </a:ext>
+          </a:extLst>
+        </p:cNvPr>
+        <p:cNvGrpSpPr/>
+        <p:nvPr/>
+      </p:nvGrpSpPr>
+      <p:grpSpPr>
+        <a:xfrm>
+          <a:off x="0" y="0"/>
+          <a:ext cx="0" cy="0"/>
+          <a:chOff x="0" y="0"/>
+          <a:chExt cx="0" cy="0"/>
+        </a:xfrm>
+      </p:grpSpPr>
+      <p:sp>
+        <p:nvSpPr>
+          <p:cNvPr id="2" name="标题 1">
+            <a:extLst>
+              <a:ext uri="{FF2B5EF4-FFF2-40B4-BE49-F238E27FC236}">
+                <a16:creationId xmlns:a16="http://schemas.microsoft.com/office/drawing/2014/main" id="{4B7F83C4-E5E0-96BA-633E-F18A895C3167}"/>
+              </a:ext>
+            </a:extLst>
+          </p:cNvPr>
+          <p:cNvSpPr>
+            <a:spLocks noGrp="1"/>
+          </p:cNvSpPr>
+          <p:nvPr>
+            <p:ph type="title"/>
+          </p:nvPr>
+        </p:nvSpPr>
+        <p:spPr>
+          <a:xfrm>
+            <a:off x="838952" y="-142137"/>
+            <a:ext cx="10515600" cy="1325563"/>
+          </a:xfrm>
+        </p:spPr>
+        <p:txBody>
+          <a:bodyPr/>
+          <a:lstStyle/>
+          <a:p>
+            <a:r>
+              <a:rPr lang="en-US" altLang="zh-CN" b="1" dirty="0">
+                <a:latin typeface="方正大标宋简体" panose="02010601030101010101" pitchFamily="2" charset="-122"/>
+                <a:ea typeface="方正大标宋简体" panose="02010601030101010101" pitchFamily="2" charset="-122"/>
+              </a:rPr>
+              <a:t>Code Review: </a:t>
+            </a:r>
+            <a:r>
+              <a:rPr lang="en-US" altLang="zh-CN" sz="4000" b="1" dirty="0">
+                <a:latin typeface="方正大标宋简体" panose="02010601030101010101" pitchFamily="2" charset="-122"/>
+                <a:ea typeface="方正大标宋简体" panose="02010601030101010101" pitchFamily="2" charset="-122"/>
+              </a:rPr>
+              <a:t>Memory Leak Detection</a:t>
+            </a:r>
+            <a:endParaRPr lang="zh-CN" altLang="en-US" sz="4000" b="1" dirty="0">
+              <a:ea typeface="方正大标宋简体" panose="02010601030101010101" pitchFamily="2" charset="-122"/>
+            </a:endParaRPr>
+          </a:p>
+        </p:txBody>
+      </p:sp>
+      <p:sp>
+        <p:nvSpPr>
+          <p:cNvPr id="3" name="内容占位符 2">
+            <a:extLst>
+              <a:ext uri="{FF2B5EF4-FFF2-40B4-BE49-F238E27FC236}">
+                <a16:creationId xmlns:a16="http://schemas.microsoft.com/office/drawing/2014/main" id="{9AD72CFF-E211-22DD-AB09-4FF35DBD428B}"/>
+              </a:ext>
+            </a:extLst>
+          </p:cNvPr>
+          <p:cNvSpPr>
+            <a:spLocks noGrp="1"/>
+          </p:cNvSpPr>
+          <p:nvPr>
+            <p:ph idx="1"/>
+          </p:nvPr>
+        </p:nvSpPr>
+        <p:spPr>
+          <a:xfrm>
+            <a:off x="893292" y="945264"/>
+            <a:ext cx="10752117" cy="3637024"/>
+          </a:xfrm>
+        </p:spPr>
+        <p:txBody>
+          <a:bodyPr/>
+          <a:lstStyle/>
+          <a:p>
+            <a:r>
+              <a:rPr lang="en-US" altLang="zh-CN" dirty="0">
+                <a:latin typeface="Times New Roman" panose="02020603050405020304" pitchFamily="18" charset="0"/>
+                <a:cs typeface="Times New Roman" panose="02020603050405020304" pitchFamily="18" charset="0"/>
+              </a:rPr>
+              <a:t>Running </a:t>
+            </a:r>
+            <a:r>
+              <a:rPr lang="en-US" altLang="zh-CN" b="1" dirty="0" err="1">
+                <a:solidFill>
+                  <a:srgbClr val="009A9A"/>
+                </a:solidFill>
+                <a:latin typeface="Times New Roman" panose="02020603050405020304" pitchFamily="18" charset="0"/>
+                <a:cs typeface="Times New Roman" panose="02020603050405020304" pitchFamily="18" charset="0"/>
+              </a:rPr>
+              <a:t>Valgrind</a:t>
+            </a:r>
+            <a:r>
+              <a:rPr lang="en-US" altLang="zh-CN" dirty="0">
+                <a:latin typeface="Times New Roman" panose="02020603050405020304" pitchFamily="18" charset="0"/>
+                <a:cs typeface="Times New Roman" panose="02020603050405020304" pitchFamily="18" charset="0"/>
+              </a:rPr>
+              <a:t> on the C++ project</a:t>
+            </a:r>
+          </a:p>
+          <a:p>
+            <a:r>
+              <a:rPr lang="en-US" altLang="zh-CN" dirty="0">
+                <a:latin typeface="Times New Roman" panose="02020603050405020304" pitchFamily="18" charset="0"/>
+                <a:cs typeface="Times New Roman" panose="02020603050405020304" pitchFamily="18" charset="0"/>
+              </a:rPr>
+              <a:t>Interpreting the results and identifying leak sources</a:t>
+            </a:r>
+          </a:p>
+          <a:p>
+            <a:r>
+              <a:rPr lang="en-US" altLang="zh-CN" dirty="0">
+                <a:latin typeface="Times New Roman" panose="02020603050405020304" pitchFamily="18" charset="0"/>
+                <a:cs typeface="Times New Roman" panose="02020603050405020304" pitchFamily="18" charset="0"/>
+              </a:rPr>
+              <a:t>Fixing memory leaks based on </a:t>
+            </a:r>
+            <a:r>
+              <a:rPr lang="en-US" altLang="zh-CN" dirty="0" err="1">
+                <a:latin typeface="Times New Roman" panose="02020603050405020304" pitchFamily="18" charset="0"/>
+                <a:cs typeface="Times New Roman" panose="02020603050405020304" pitchFamily="18" charset="0"/>
+              </a:rPr>
+              <a:t>Valgrind's</a:t>
+            </a:r>
+            <a:r>
+              <a:rPr lang="en-US" altLang="zh-CN" dirty="0">
+                <a:latin typeface="Times New Roman" panose="02020603050405020304" pitchFamily="18" charset="0"/>
+                <a:cs typeface="Times New Roman" panose="02020603050405020304" pitchFamily="18" charset="0"/>
+              </a:rPr>
+              <a:t> reports</a:t>
+            </a:r>
+          </a:p>
+          <a:p>
+            <a:pPr marL="0" indent="0">
+              <a:buNone/>
+            </a:pPr>
+            <a:endParaRPr lang="zh-CN" altLang="en-US" dirty="0">
+              <a:latin typeface="Times New Roman" panose="02020603050405020304" pitchFamily="18" charset="0"/>
+              <a:cs typeface="Times New Roman" panose="02020603050405020304" pitchFamily="18" charset="0"/>
+            </a:endParaRPr>
+          </a:p>
+        </p:txBody>
+      </p:sp>
+      <p:pic>
+        <p:nvPicPr>
+          <p:cNvPr id="27" name="图片 26">
+            <a:extLst>
+              <a:ext uri="{FF2B5EF4-FFF2-40B4-BE49-F238E27FC236}">
+                <a16:creationId xmlns:a16="http://schemas.microsoft.com/office/drawing/2014/main" id="{73997124-B5DE-D949-119F-768110EA17BC}"/>
+              </a:ext>
+            </a:extLst>
+          </p:cNvPr>
+          <p:cNvPicPr>
+            <a:picLocks noChangeAspect="1"/>
+          </p:cNvPicPr>
+          <p:nvPr/>
+        </p:nvPicPr>
+        <p:blipFill>
+          <a:blip r:embed="rId2"/>
+          <a:stretch>
+            <a:fillRect/>
+          </a:stretch>
+        </p:blipFill>
+        <p:spPr>
+          <a:xfrm>
+            <a:off x="1230592" y="2546599"/>
+            <a:ext cx="7806971" cy="4071377"/>
+          </a:xfrm>
+          <a:prstGeom prst="rect">
+            <a:avLst/>
+          </a:prstGeom>
+        </p:spPr>
+      </p:pic>
+    </p:spTree>
+    <p:extLst>
+      <p:ext uri="{BB962C8B-B14F-4D97-AF65-F5344CB8AC3E}">
+        <p14:creationId xmlns:p14="http://schemas.microsoft.com/office/powerpoint/2010/main" val="2071578967"/>
+      </p:ext>
+    </p:extLst>
+  </p:cSld>
+  <p:clrMapOvr>
+    <a:masterClrMapping/>
+  </p:clrMapOvr>
+</p:sld>
+</file>
+
 <file path=ppt/theme/theme1.xml><?xml version="1.0" encoding="utf-8"?>
 <a:theme xmlns:a="http://schemas.openxmlformats.org/drawingml/2006/main" name="Office 主题​​">
   <a:themeElements>
@@ -6659,7 +7257,7 @@
         <a:sysClr val="windowText" lastClr="000000"/>
       </a:dk1>
       <a:lt1>
-        <a:sysClr val="window" lastClr="CAEACE"/>
+        <a:sysClr val="window" lastClr="FFFFFF"/>
       </a:lt1>
       <a:dk2>
         <a:srgbClr val="44546A"/>

--- a/docs/LuckyServer.pptx
+++ b/docs/LuckyServer.pptx
@@ -11,6 +11,12 @@
     <p:sldId id="259" r:id="rId5"/>
     <p:sldId id="260" r:id="rId6"/>
     <p:sldId id="261" r:id="rId7"/>
+    <p:sldId id="268" r:id="rId8"/>
+    <p:sldId id="265" r:id="rId9"/>
+    <p:sldId id="263" r:id="rId10"/>
+    <p:sldId id="267" r:id="rId11"/>
+    <p:sldId id="264" r:id="rId12"/>
+    <p:sldId id="266" r:id="rId13"/>
   </p:sldIdLst>
   <p:sldSz cx="12192000" cy="6858000"/>
   <p:notesSz cx="6858000" cy="9144000"/>
@@ -264,7 +270,7 @@
           <a:p>
             <a:fld id="{578C14AD-157C-4B19-B926-4C213759CBF9}" type="datetimeFigureOut">
               <a:rPr lang="zh-CN" altLang="en-US" smtClean="0"/>
-              <a:t>2024/10/19</a:t>
+              <a:t>2024/10/21</a:t>
             </a:fld>
             <a:endParaRPr lang="zh-CN" altLang="en-US"/>
           </a:p>
@@ -462,7 +468,7 @@
           <a:p>
             <a:fld id="{578C14AD-157C-4B19-B926-4C213759CBF9}" type="datetimeFigureOut">
               <a:rPr lang="zh-CN" altLang="en-US" smtClean="0"/>
-              <a:t>2024/10/19</a:t>
+              <a:t>2024/10/21</a:t>
             </a:fld>
             <a:endParaRPr lang="zh-CN" altLang="en-US"/>
           </a:p>
@@ -670,7 +676,7 @@
           <a:p>
             <a:fld id="{578C14AD-157C-4B19-B926-4C213759CBF9}" type="datetimeFigureOut">
               <a:rPr lang="zh-CN" altLang="en-US" smtClean="0"/>
-              <a:t>2024/10/19</a:t>
+              <a:t>2024/10/21</a:t>
             </a:fld>
             <a:endParaRPr lang="zh-CN" altLang="en-US"/>
           </a:p>
@@ -868,7 +874,7 @@
           <a:p>
             <a:fld id="{578C14AD-157C-4B19-B926-4C213759CBF9}" type="datetimeFigureOut">
               <a:rPr lang="zh-CN" altLang="en-US" smtClean="0"/>
-              <a:t>2024/10/19</a:t>
+              <a:t>2024/10/21</a:t>
             </a:fld>
             <a:endParaRPr lang="zh-CN" altLang="en-US"/>
           </a:p>
@@ -1143,7 +1149,7 @@
           <a:p>
             <a:fld id="{578C14AD-157C-4B19-B926-4C213759CBF9}" type="datetimeFigureOut">
               <a:rPr lang="zh-CN" altLang="en-US" smtClean="0"/>
-              <a:t>2024/10/19</a:t>
+              <a:t>2024/10/21</a:t>
             </a:fld>
             <a:endParaRPr lang="zh-CN" altLang="en-US"/>
           </a:p>
@@ -1408,7 +1414,7 @@
           <a:p>
             <a:fld id="{578C14AD-157C-4B19-B926-4C213759CBF9}" type="datetimeFigureOut">
               <a:rPr lang="zh-CN" altLang="en-US" smtClean="0"/>
-              <a:t>2024/10/19</a:t>
+              <a:t>2024/10/21</a:t>
             </a:fld>
             <a:endParaRPr lang="zh-CN" altLang="en-US"/>
           </a:p>
@@ -1820,7 +1826,7 @@
           <a:p>
             <a:fld id="{578C14AD-157C-4B19-B926-4C213759CBF9}" type="datetimeFigureOut">
               <a:rPr lang="zh-CN" altLang="en-US" smtClean="0"/>
-              <a:t>2024/10/19</a:t>
+              <a:t>2024/10/21</a:t>
             </a:fld>
             <a:endParaRPr lang="zh-CN" altLang="en-US"/>
           </a:p>
@@ -1961,7 +1967,7 @@
           <a:p>
             <a:fld id="{578C14AD-157C-4B19-B926-4C213759CBF9}" type="datetimeFigureOut">
               <a:rPr lang="zh-CN" altLang="en-US" smtClean="0"/>
-              <a:t>2024/10/19</a:t>
+              <a:t>2024/10/21</a:t>
             </a:fld>
             <a:endParaRPr lang="zh-CN" altLang="en-US"/>
           </a:p>
@@ -2074,7 +2080,7 @@
           <a:p>
             <a:fld id="{578C14AD-157C-4B19-B926-4C213759CBF9}" type="datetimeFigureOut">
               <a:rPr lang="zh-CN" altLang="en-US" smtClean="0"/>
-              <a:t>2024/10/19</a:t>
+              <a:t>2024/10/21</a:t>
             </a:fld>
             <a:endParaRPr lang="zh-CN" altLang="en-US"/>
           </a:p>
@@ -2385,7 +2391,7 @@
           <a:p>
             <a:fld id="{578C14AD-157C-4B19-B926-4C213759CBF9}" type="datetimeFigureOut">
               <a:rPr lang="zh-CN" altLang="en-US" smtClean="0"/>
-              <a:t>2024/10/19</a:t>
+              <a:t>2024/10/21</a:t>
             </a:fld>
             <a:endParaRPr lang="zh-CN" altLang="en-US"/>
           </a:p>
@@ -2673,7 +2679,7 @@
           <a:p>
             <a:fld id="{578C14AD-157C-4B19-B926-4C213759CBF9}" type="datetimeFigureOut">
               <a:rPr lang="zh-CN" altLang="en-US" smtClean="0"/>
-              <a:t>2024/10/19</a:t>
+              <a:t>2024/10/21</a:t>
             </a:fld>
             <a:endParaRPr lang="zh-CN" altLang="en-US"/>
           </a:p>
@@ -2914,7 +2920,7 @@
           <a:p>
             <a:fld id="{578C14AD-157C-4B19-B926-4C213759CBF9}" type="datetimeFigureOut">
               <a:rPr lang="zh-CN" altLang="en-US" smtClean="0"/>
-              <a:t>2024/10/19</a:t>
+              <a:t>2024/10/21</a:t>
             </a:fld>
             <a:endParaRPr lang="zh-CN" altLang="en-US"/>
           </a:p>
@@ -3414,6 +3420,396 @@
 </p:sld>
 </file>
 
+<file path=ppt/slides/slide10.xml><?xml version="1.0" encoding="utf-8"?>
+<p:sld xmlns:a="http://schemas.openxmlformats.org/drawingml/2006/main" xmlns:r="http://schemas.openxmlformats.org/officeDocument/2006/relationships" xmlns:p="http://schemas.openxmlformats.org/presentationml/2006/main">
+  <p:cSld>
+    <p:spTree>
+      <p:nvGrpSpPr>
+        <p:cNvPr id="1" name="">
+          <a:extLst>
+            <a:ext uri="{FF2B5EF4-FFF2-40B4-BE49-F238E27FC236}">
+              <a16:creationId xmlns:a16="http://schemas.microsoft.com/office/drawing/2014/main" id="{94ACB56B-B2CB-794D-64BC-2A76E2BBD2E5}"/>
+            </a:ext>
+          </a:extLst>
+        </p:cNvPr>
+        <p:cNvGrpSpPr/>
+        <p:nvPr/>
+      </p:nvGrpSpPr>
+      <p:grpSpPr>
+        <a:xfrm>
+          <a:off x="0" y="0"/>
+          <a:ext cx="0" cy="0"/>
+          <a:chOff x="0" y="0"/>
+          <a:chExt cx="0" cy="0"/>
+        </a:xfrm>
+      </p:grpSpPr>
+      <p:sp>
+        <p:nvSpPr>
+          <p:cNvPr id="2" name="标题 1">
+            <a:extLst>
+              <a:ext uri="{FF2B5EF4-FFF2-40B4-BE49-F238E27FC236}">
+                <a16:creationId xmlns:a16="http://schemas.microsoft.com/office/drawing/2014/main" id="{60899F4A-E104-FC45-5FE2-07AD8563649E}"/>
+              </a:ext>
+            </a:extLst>
+          </p:cNvPr>
+          <p:cNvSpPr>
+            <a:spLocks noGrp="1"/>
+          </p:cNvSpPr>
+          <p:nvPr>
+            <p:ph type="title"/>
+          </p:nvPr>
+        </p:nvSpPr>
+        <p:spPr>
+          <a:xfrm>
+            <a:off x="838952" y="-142137"/>
+            <a:ext cx="10515600" cy="1325563"/>
+          </a:xfrm>
+        </p:spPr>
+        <p:txBody>
+          <a:bodyPr/>
+          <a:lstStyle/>
+          <a:p>
+            <a:r>
+              <a:rPr lang="en-US" altLang="zh-CN" b="1" dirty="0">
+                <a:latin typeface="方正大标宋简体" panose="02010601030101010101" pitchFamily="2" charset="-122"/>
+                <a:ea typeface="方正大标宋简体" panose="02010601030101010101" pitchFamily="2" charset="-122"/>
+              </a:rPr>
+              <a:t>Code Review: </a:t>
+            </a:r>
+            <a:r>
+              <a:rPr lang="en-US" altLang="zh-CN" sz="4000" b="1" dirty="0">
+                <a:latin typeface="方正大标宋简体" panose="02010601030101010101" pitchFamily="2" charset="-122"/>
+                <a:ea typeface="方正大标宋简体" panose="02010601030101010101" pitchFamily="2" charset="-122"/>
+              </a:rPr>
+              <a:t>Google C++ Style Guide</a:t>
+            </a:r>
+            <a:endParaRPr lang="zh-CN" altLang="en-US" sz="4000" b="1" dirty="0">
+              <a:ea typeface="方正大标宋简体" panose="02010601030101010101" pitchFamily="2" charset="-122"/>
+            </a:endParaRPr>
+          </a:p>
+        </p:txBody>
+      </p:sp>
+      <p:pic>
+        <p:nvPicPr>
+          <p:cNvPr id="8" name="图片 7">
+            <a:extLst>
+              <a:ext uri="{FF2B5EF4-FFF2-40B4-BE49-F238E27FC236}">
+                <a16:creationId xmlns:a16="http://schemas.microsoft.com/office/drawing/2014/main" id="{A8086636-4F43-4E5B-A2E2-FD0C45171291}"/>
+              </a:ext>
+            </a:extLst>
+          </p:cNvPr>
+          <p:cNvPicPr>
+            <a:picLocks noChangeAspect="1"/>
+          </p:cNvPicPr>
+          <p:nvPr/>
+        </p:nvPicPr>
+        <p:blipFill>
+          <a:blip r:embed="rId2"/>
+          <a:stretch>
+            <a:fillRect/>
+          </a:stretch>
+        </p:blipFill>
+        <p:spPr>
+          <a:xfrm>
+            <a:off x="0" y="192881"/>
+            <a:ext cx="12192000" cy="6472238"/>
+          </a:xfrm>
+          <a:prstGeom prst="rect">
+            <a:avLst/>
+          </a:prstGeom>
+        </p:spPr>
+      </p:pic>
+    </p:spTree>
+    <p:extLst>
+      <p:ext uri="{BB962C8B-B14F-4D97-AF65-F5344CB8AC3E}">
+        <p14:creationId xmlns:p14="http://schemas.microsoft.com/office/powerpoint/2010/main" val="388531116"/>
+      </p:ext>
+    </p:extLst>
+  </p:cSld>
+  <p:clrMapOvr>
+    <a:masterClrMapping/>
+  </p:clrMapOvr>
+</p:sld>
+</file>
+
+<file path=ppt/slides/slide11.xml><?xml version="1.0" encoding="utf-8"?>
+<p:sld xmlns:a="http://schemas.openxmlformats.org/drawingml/2006/main" xmlns:r="http://schemas.openxmlformats.org/officeDocument/2006/relationships" xmlns:p="http://schemas.openxmlformats.org/presentationml/2006/main">
+  <p:cSld>
+    <p:spTree>
+      <p:nvGrpSpPr>
+        <p:cNvPr id="1" name="">
+          <a:extLst>
+            <a:ext uri="{FF2B5EF4-FFF2-40B4-BE49-F238E27FC236}">
+              <a16:creationId xmlns:a16="http://schemas.microsoft.com/office/drawing/2014/main" id="{3D3021CA-2B1C-55EC-471F-1305B5E79685}"/>
+            </a:ext>
+          </a:extLst>
+        </p:cNvPr>
+        <p:cNvGrpSpPr/>
+        <p:nvPr/>
+      </p:nvGrpSpPr>
+      <p:grpSpPr>
+        <a:xfrm>
+          <a:off x="0" y="0"/>
+          <a:ext cx="0" cy="0"/>
+          <a:chOff x="0" y="0"/>
+          <a:chExt cx="0" cy="0"/>
+        </a:xfrm>
+      </p:grpSpPr>
+      <p:sp>
+        <p:nvSpPr>
+          <p:cNvPr id="2" name="标题 1">
+            <a:extLst>
+              <a:ext uri="{FF2B5EF4-FFF2-40B4-BE49-F238E27FC236}">
+                <a16:creationId xmlns:a16="http://schemas.microsoft.com/office/drawing/2014/main" id="{4B7F83C4-E5E0-96BA-633E-F18A895C3167}"/>
+              </a:ext>
+            </a:extLst>
+          </p:cNvPr>
+          <p:cNvSpPr>
+            <a:spLocks noGrp="1"/>
+          </p:cNvSpPr>
+          <p:nvPr>
+            <p:ph type="title"/>
+          </p:nvPr>
+        </p:nvSpPr>
+        <p:spPr>
+          <a:xfrm>
+            <a:off x="838952" y="-142137"/>
+            <a:ext cx="10515600" cy="1325563"/>
+          </a:xfrm>
+        </p:spPr>
+        <p:txBody>
+          <a:bodyPr/>
+          <a:lstStyle/>
+          <a:p>
+            <a:r>
+              <a:rPr lang="en-US" altLang="zh-CN" b="1" dirty="0">
+                <a:latin typeface="方正大标宋简体" panose="02010601030101010101" pitchFamily="2" charset="-122"/>
+                <a:ea typeface="方正大标宋简体" panose="02010601030101010101" pitchFamily="2" charset="-122"/>
+              </a:rPr>
+              <a:t>Code Review: </a:t>
+            </a:r>
+            <a:r>
+              <a:rPr lang="en-US" altLang="zh-CN" sz="4000" b="1" dirty="0">
+                <a:latin typeface="方正大标宋简体" panose="02010601030101010101" pitchFamily="2" charset="-122"/>
+                <a:ea typeface="方正大标宋简体" panose="02010601030101010101" pitchFamily="2" charset="-122"/>
+              </a:rPr>
+              <a:t>Memory Leak Detection</a:t>
+            </a:r>
+            <a:endParaRPr lang="zh-CN" altLang="en-US" sz="4000" b="1" dirty="0">
+              <a:ea typeface="方正大标宋简体" panose="02010601030101010101" pitchFamily="2" charset="-122"/>
+            </a:endParaRPr>
+          </a:p>
+        </p:txBody>
+      </p:sp>
+      <p:sp>
+        <p:nvSpPr>
+          <p:cNvPr id="3" name="内容占位符 2">
+            <a:extLst>
+              <a:ext uri="{FF2B5EF4-FFF2-40B4-BE49-F238E27FC236}">
+                <a16:creationId xmlns:a16="http://schemas.microsoft.com/office/drawing/2014/main" id="{9AD72CFF-E211-22DD-AB09-4FF35DBD428B}"/>
+              </a:ext>
+            </a:extLst>
+          </p:cNvPr>
+          <p:cNvSpPr>
+            <a:spLocks noGrp="1"/>
+          </p:cNvSpPr>
+          <p:nvPr>
+            <p:ph idx="1"/>
+          </p:nvPr>
+        </p:nvSpPr>
+        <p:spPr>
+          <a:xfrm>
+            <a:off x="893292" y="945264"/>
+            <a:ext cx="10752117" cy="3637024"/>
+          </a:xfrm>
+        </p:spPr>
+        <p:txBody>
+          <a:bodyPr/>
+          <a:lstStyle/>
+          <a:p>
+            <a:r>
+              <a:rPr lang="en-US" altLang="zh-CN" dirty="0">
+                <a:latin typeface="Times New Roman" panose="02020603050405020304" pitchFamily="18" charset="0"/>
+                <a:cs typeface="Times New Roman" panose="02020603050405020304" pitchFamily="18" charset="0"/>
+              </a:rPr>
+              <a:t>Running </a:t>
+            </a:r>
+            <a:r>
+              <a:rPr lang="en-US" altLang="zh-CN" b="1" dirty="0" err="1">
+                <a:solidFill>
+                  <a:srgbClr val="009A9A"/>
+                </a:solidFill>
+                <a:latin typeface="Times New Roman" panose="02020603050405020304" pitchFamily="18" charset="0"/>
+                <a:cs typeface="Times New Roman" panose="02020603050405020304" pitchFamily="18" charset="0"/>
+              </a:rPr>
+              <a:t>Valgrind</a:t>
+            </a:r>
+            <a:r>
+              <a:rPr lang="en-US" altLang="zh-CN" dirty="0">
+                <a:latin typeface="Times New Roman" panose="02020603050405020304" pitchFamily="18" charset="0"/>
+                <a:cs typeface="Times New Roman" panose="02020603050405020304" pitchFamily="18" charset="0"/>
+              </a:rPr>
+              <a:t> on the C++ project</a:t>
+            </a:r>
+          </a:p>
+          <a:p>
+            <a:r>
+              <a:rPr lang="en-US" altLang="zh-CN" dirty="0">
+                <a:latin typeface="Times New Roman" panose="02020603050405020304" pitchFamily="18" charset="0"/>
+                <a:cs typeface="Times New Roman" panose="02020603050405020304" pitchFamily="18" charset="0"/>
+              </a:rPr>
+              <a:t>Interpreting the results and identifying leak sources</a:t>
+            </a:r>
+          </a:p>
+          <a:p>
+            <a:r>
+              <a:rPr lang="en-US" altLang="zh-CN" dirty="0">
+                <a:latin typeface="Times New Roman" panose="02020603050405020304" pitchFamily="18" charset="0"/>
+                <a:cs typeface="Times New Roman" panose="02020603050405020304" pitchFamily="18" charset="0"/>
+              </a:rPr>
+              <a:t>Fixing memory leaks based on </a:t>
+            </a:r>
+            <a:r>
+              <a:rPr lang="en-US" altLang="zh-CN" dirty="0" err="1">
+                <a:latin typeface="Times New Roman" panose="02020603050405020304" pitchFamily="18" charset="0"/>
+                <a:cs typeface="Times New Roman" panose="02020603050405020304" pitchFamily="18" charset="0"/>
+              </a:rPr>
+              <a:t>Valgrind's</a:t>
+            </a:r>
+            <a:r>
+              <a:rPr lang="en-US" altLang="zh-CN" dirty="0">
+                <a:latin typeface="Times New Roman" panose="02020603050405020304" pitchFamily="18" charset="0"/>
+                <a:cs typeface="Times New Roman" panose="02020603050405020304" pitchFamily="18" charset="0"/>
+              </a:rPr>
+              <a:t> reports</a:t>
+            </a:r>
+          </a:p>
+          <a:p>
+            <a:pPr marL="0" indent="0">
+              <a:buNone/>
+            </a:pPr>
+            <a:endParaRPr lang="zh-CN" altLang="en-US" dirty="0">
+              <a:latin typeface="Times New Roman" panose="02020603050405020304" pitchFamily="18" charset="0"/>
+              <a:cs typeface="Times New Roman" panose="02020603050405020304" pitchFamily="18" charset="0"/>
+            </a:endParaRPr>
+          </a:p>
+        </p:txBody>
+      </p:sp>
+      <p:pic>
+        <p:nvPicPr>
+          <p:cNvPr id="27" name="图片 26">
+            <a:extLst>
+              <a:ext uri="{FF2B5EF4-FFF2-40B4-BE49-F238E27FC236}">
+                <a16:creationId xmlns:a16="http://schemas.microsoft.com/office/drawing/2014/main" id="{73997124-B5DE-D949-119F-768110EA17BC}"/>
+              </a:ext>
+            </a:extLst>
+          </p:cNvPr>
+          <p:cNvPicPr>
+            <a:picLocks noChangeAspect="1"/>
+          </p:cNvPicPr>
+          <p:nvPr/>
+        </p:nvPicPr>
+        <p:blipFill>
+          <a:blip r:embed="rId2"/>
+          <a:stretch>
+            <a:fillRect/>
+          </a:stretch>
+        </p:blipFill>
+        <p:spPr>
+          <a:xfrm>
+            <a:off x="1230592" y="2546599"/>
+            <a:ext cx="7806971" cy="4071377"/>
+          </a:xfrm>
+          <a:prstGeom prst="rect">
+            <a:avLst/>
+          </a:prstGeom>
+        </p:spPr>
+      </p:pic>
+    </p:spTree>
+    <p:extLst>
+      <p:ext uri="{BB962C8B-B14F-4D97-AF65-F5344CB8AC3E}">
+        <p14:creationId xmlns:p14="http://schemas.microsoft.com/office/powerpoint/2010/main" val="2071578967"/>
+      </p:ext>
+    </p:extLst>
+  </p:cSld>
+  <p:clrMapOvr>
+    <a:masterClrMapping/>
+  </p:clrMapOvr>
+</p:sld>
+</file>
+
+<file path=ppt/slides/slide12.xml><?xml version="1.0" encoding="utf-8"?>
+<p:sld xmlns:a="http://schemas.openxmlformats.org/drawingml/2006/main" xmlns:r="http://schemas.openxmlformats.org/officeDocument/2006/relationships" xmlns:p="http://schemas.openxmlformats.org/presentationml/2006/main">
+  <p:cSld>
+    <p:spTree>
+      <p:nvGrpSpPr>
+        <p:cNvPr id="1" name=""/>
+        <p:cNvGrpSpPr/>
+        <p:nvPr/>
+      </p:nvGrpSpPr>
+      <p:grpSpPr>
+        <a:xfrm>
+          <a:off x="0" y="0"/>
+          <a:ext cx="0" cy="0"/>
+          <a:chOff x="0" y="0"/>
+          <a:chExt cx="0" cy="0"/>
+        </a:xfrm>
+      </p:grpSpPr>
+      <p:sp>
+        <p:nvSpPr>
+          <p:cNvPr id="2" name="标题 1">
+            <a:extLst>
+              <a:ext uri="{FF2B5EF4-FFF2-40B4-BE49-F238E27FC236}">
+                <a16:creationId xmlns:a16="http://schemas.microsoft.com/office/drawing/2014/main" id="{0CEB5E64-0D5C-4235-8380-F8084BC73BFB}"/>
+              </a:ext>
+            </a:extLst>
+          </p:cNvPr>
+          <p:cNvSpPr>
+            <a:spLocks noGrp="1"/>
+          </p:cNvSpPr>
+          <p:nvPr>
+            <p:ph type="title"/>
+          </p:nvPr>
+        </p:nvSpPr>
+        <p:spPr>
+          <a:xfrm>
+            <a:off x="3777837" y="2766218"/>
+            <a:ext cx="4636325" cy="1325563"/>
+          </a:xfrm>
+        </p:spPr>
+        <p:txBody>
+          <a:bodyPr>
+            <a:normAutofit/>
+          </a:bodyPr>
+          <a:lstStyle/>
+          <a:p>
+            <a:r>
+              <a:rPr lang="en-US" altLang="zh-CN" sz="6600" dirty="0">
+                <a:latin typeface="方正大标宋简体" panose="02010601030101010101" pitchFamily="2" charset="-122"/>
+                <a:ea typeface="方正大标宋简体" panose="02010601030101010101" pitchFamily="2" charset="-122"/>
+              </a:rPr>
+              <a:t>Thank You</a:t>
+            </a:r>
+            <a:endParaRPr lang="zh-CN" altLang="en-US" sz="6600" dirty="0">
+              <a:latin typeface="方正大标宋简体" panose="02010601030101010101" pitchFamily="2" charset="-122"/>
+              <a:ea typeface="方正大标宋简体" panose="02010601030101010101" pitchFamily="2" charset="-122"/>
+            </a:endParaRPr>
+          </a:p>
+        </p:txBody>
+      </p:sp>
+    </p:spTree>
+    <p:extLst>
+      <p:ext uri="{BB962C8B-B14F-4D97-AF65-F5344CB8AC3E}">
+        <p14:creationId xmlns:p14="http://schemas.microsoft.com/office/powerpoint/2010/main" val="2787230198"/>
+      </p:ext>
+    </p:extLst>
+  </p:cSld>
+  <p:clrMapOvr>
+    <a:masterClrMapping/>
+  </p:clrMapOvr>
+</p:sld>
+</file>
+
 <file path=ppt/slides/slide2.xml><?xml version="1.0" encoding="utf-8"?>
 <p:sld xmlns:a="http://schemas.openxmlformats.org/drawingml/2006/main" xmlns:r="http://schemas.openxmlformats.org/officeDocument/2006/relationships" xmlns:p="http://schemas.openxmlformats.org/presentationml/2006/main">
   <p:cSld>
@@ -3486,12 +3882,21 @@
         </p:nvSpPr>
         <p:spPr/>
         <p:txBody>
-          <a:bodyPr/>
+          <a:bodyPr>
+            <a:normAutofit lnSpcReduction="10000"/>
+          </a:bodyPr>
           <a:lstStyle/>
           <a:p>
             <a:pPr marL="0" indent="0">
               <a:buNone/>
             </a:pPr>
+            <a:r>
+              <a:rPr lang="zh-CN" altLang="en-US" b="1" dirty="0">
+                <a:latin typeface="Times New Roman" panose="02020603050405020304" pitchFamily="18" charset="0"/>
+                <a:cs typeface="Times New Roman" panose="02020603050405020304" pitchFamily="18" charset="0"/>
+              </a:rPr>
+              <a:t>⭐</a:t>
+            </a:r>
             <a:r>
               <a:rPr lang="en-US" altLang="zh-CN" b="1" dirty="0">
                 <a:latin typeface="Times New Roman" panose="02020603050405020304" pitchFamily="18" charset="0"/>
@@ -3532,12 +3937,40 @@
               <a:buNone/>
             </a:pPr>
             <a:r>
+              <a:rPr lang="zh-CN" altLang="en-US" b="1" dirty="0">
+                <a:latin typeface="Times New Roman" panose="02020603050405020304" pitchFamily="18" charset="0"/>
+                <a:cs typeface="Times New Roman" panose="02020603050405020304" pitchFamily="18" charset="0"/>
+              </a:rPr>
+              <a:t>⭐ </a:t>
+            </a:r>
+            <a:r>
               <a:rPr lang="en-US" altLang="zh-CN" b="1" dirty="0">
                 <a:latin typeface="Times New Roman" panose="02020603050405020304" pitchFamily="18" charset="0"/>
                 <a:cs typeface="Times New Roman" panose="02020603050405020304" pitchFamily="18" charset="0"/>
               </a:rPr>
               <a:t>Our engineering experience</a:t>
             </a:r>
+          </a:p>
+          <a:p>
+            <a:r>
+              <a:rPr lang="en-US" altLang="zh-CN" dirty="0">
+                <a:latin typeface="Times New Roman" panose="02020603050405020304" pitchFamily="18" charset="0"/>
+                <a:cs typeface="Times New Roman" panose="02020603050405020304" pitchFamily="18" charset="0"/>
+              </a:rPr>
+              <a:t>M</a:t>
+            </a:r>
+            <a:r>
+              <a:rPr lang="en-US" altLang="zh-CN" dirty="0">
+                <a:effectLst/>
+                <a:latin typeface="Times New Roman" panose="02020603050405020304" pitchFamily="18" charset="0"/>
+                <a:cs typeface="Times New Roman" panose="02020603050405020304" pitchFamily="18" charset="0"/>
+              </a:rPr>
+              <a:t>ake some little test tools during developing our project</a:t>
+            </a:r>
+            <a:endParaRPr lang="en-US" altLang="zh-CN" dirty="0">
+              <a:latin typeface="Times New Roman" panose="02020603050405020304" pitchFamily="18" charset="0"/>
+              <a:cs typeface="Times New Roman" panose="02020603050405020304" pitchFamily="18" charset="0"/>
+            </a:endParaRPr>
           </a:p>
           <a:p>
             <a:r>
@@ -4316,18 +4749,11 @@
           <a:lstStyle/>
           <a:p>
             <a:r>
-              <a:rPr lang="en-US" altLang="zh-CN" dirty="0" err="1">
-                <a:latin typeface="Times New Roman" panose="02020603050405020304" pitchFamily="18" charset="0"/>
-                <a:cs typeface="Times New Roman" panose="02020603050405020304" pitchFamily="18" charset="0"/>
-              </a:rPr>
-              <a:t>epoll</a:t>
-            </a:r>
-            <a:r>
-              <a:rPr lang="en-US" altLang="zh-CN" dirty="0">
-                <a:latin typeface="Times New Roman" panose="02020603050405020304" pitchFamily="18" charset="0"/>
-                <a:cs typeface="Times New Roman" panose="02020603050405020304" pitchFamily="18" charset="0"/>
-              </a:rPr>
-              <a:t> is a </a:t>
+              <a:rPr lang="en-US" altLang="zh-CN" dirty="0">
+                <a:latin typeface="Times New Roman" panose="02020603050405020304" pitchFamily="18" charset="0"/>
+                <a:cs typeface="Times New Roman" panose="02020603050405020304" pitchFamily="18" charset="0"/>
+              </a:rPr>
+              <a:t>Epoll is a </a:t>
             </a:r>
             <a:r>
               <a:rPr lang="en-US" altLang="zh-CN" b="1" dirty="0">
@@ -4865,6 +5291,55 @@
               <a:latin typeface="Consolas" panose="020B0609020204030204" pitchFamily="49" charset="0"/>
               <a:cs typeface="Times New Roman" panose="02020603050405020304" pitchFamily="18" charset="0"/>
             </a:endParaRPr>
+          </a:p>
+        </p:txBody>
+      </p:sp>
+      <p:sp>
+        <p:nvSpPr>
+          <p:cNvPr id="8" name="左大括号 7">
+            <a:extLst>
+              <a:ext uri="{FF2B5EF4-FFF2-40B4-BE49-F238E27FC236}">
+                <a16:creationId xmlns:a16="http://schemas.microsoft.com/office/drawing/2014/main" id="{E24D429D-B76B-4605-B915-ADBB38CB3341}"/>
+              </a:ext>
+            </a:extLst>
+          </p:cNvPr>
+          <p:cNvSpPr/>
+          <p:nvPr/>
+        </p:nvSpPr>
+        <p:spPr>
+          <a:xfrm>
+            <a:off x="5397334" y="2787700"/>
+            <a:ext cx="504702" cy="3586348"/>
+          </a:xfrm>
+          <a:prstGeom prst="leftBrace">
+            <a:avLst/>
+          </a:prstGeom>
+          <a:ln w="38100">
+            <a:solidFill>
+              <a:srgbClr val="FF0000"/>
+            </a:solidFill>
+          </a:ln>
+        </p:spPr>
+        <p:style>
+          <a:lnRef idx="1">
+            <a:schemeClr val="accent1"/>
+          </a:lnRef>
+          <a:fillRef idx="0">
+            <a:schemeClr val="accent1"/>
+          </a:fillRef>
+          <a:effectRef idx="0">
+            <a:schemeClr val="accent1"/>
+          </a:effectRef>
+          <a:fontRef idx="minor">
+            <a:schemeClr val="tx1"/>
+          </a:fontRef>
+        </p:style>
+        <p:txBody>
+          <a:bodyPr rtlCol="0" anchor="ctr"/>
+          <a:lstStyle/>
+          <a:p>
+            <a:pPr algn="ctr"/>
+            <a:endParaRPr lang="zh-CN" altLang="en-US"/>
           </a:p>
         </p:txBody>
       </p:sp>
@@ -6642,6 +7117,867 @@
     <p:extLst>
       <p:ext uri="{BB962C8B-B14F-4D97-AF65-F5344CB8AC3E}">
         <p14:creationId xmlns:p14="http://schemas.microsoft.com/office/powerpoint/2010/main" val="3152591112"/>
+      </p:ext>
+    </p:extLst>
+  </p:cSld>
+  <p:clrMapOvr>
+    <a:masterClrMapping/>
+  </p:clrMapOvr>
+</p:sld>
+</file>
+
+<file path=ppt/slides/slide7.xml><?xml version="1.0" encoding="utf-8"?>
+<p:sld xmlns:a="http://schemas.openxmlformats.org/drawingml/2006/main" xmlns:r="http://schemas.openxmlformats.org/officeDocument/2006/relationships" xmlns:p="http://schemas.openxmlformats.org/presentationml/2006/main">
+  <p:cSld>
+    <p:spTree>
+      <p:nvGrpSpPr>
+        <p:cNvPr id="1" name="">
+          <a:extLst>
+            <a:ext uri="{FF2B5EF4-FFF2-40B4-BE49-F238E27FC236}">
+              <a16:creationId xmlns:a16="http://schemas.microsoft.com/office/drawing/2014/main" id="{9D6EC837-7D92-5E3B-9E37-0551E274E106}"/>
+            </a:ext>
+          </a:extLst>
+        </p:cNvPr>
+        <p:cNvGrpSpPr/>
+        <p:nvPr/>
+      </p:nvGrpSpPr>
+      <p:grpSpPr>
+        <a:xfrm>
+          <a:off x="0" y="0"/>
+          <a:ext cx="0" cy="0"/>
+          <a:chOff x="0" y="0"/>
+          <a:chExt cx="0" cy="0"/>
+        </a:xfrm>
+      </p:grpSpPr>
+      <p:sp>
+        <p:nvSpPr>
+          <p:cNvPr id="2" name="标题 1">
+            <a:extLst>
+              <a:ext uri="{FF2B5EF4-FFF2-40B4-BE49-F238E27FC236}">
+                <a16:creationId xmlns:a16="http://schemas.microsoft.com/office/drawing/2014/main" id="{CB6C0A98-F5E6-9532-24E2-F0C1EF59936F}"/>
+              </a:ext>
+            </a:extLst>
+          </p:cNvPr>
+          <p:cNvSpPr>
+            <a:spLocks noGrp="1"/>
+          </p:cNvSpPr>
+          <p:nvPr>
+            <p:ph type="title"/>
+          </p:nvPr>
+        </p:nvSpPr>
+        <p:spPr>
+          <a:xfrm>
+            <a:off x="838952" y="-142137"/>
+            <a:ext cx="10515600" cy="1325563"/>
+          </a:xfrm>
+        </p:spPr>
+        <p:txBody>
+          <a:bodyPr>
+            <a:normAutofit/>
+          </a:bodyPr>
+          <a:lstStyle/>
+          <a:p>
+            <a:r>
+              <a:rPr lang="en-US" altLang="zh-CN" sz="3600" b="1" dirty="0">
+                <a:latin typeface="Times New Roman" panose="02020603050405020304" pitchFamily="18" charset="0"/>
+                <a:cs typeface="Times New Roman" panose="02020603050405020304" pitchFamily="18" charset="0"/>
+              </a:rPr>
+              <a:t>Engineering: </a:t>
+            </a:r>
+            <a:r>
+              <a:rPr lang="en-US" altLang="zh-CN" sz="3600" b="1" dirty="0">
+                <a:latin typeface="方正大标宋简体" panose="02010601030101010101" pitchFamily="2" charset="-122"/>
+                <a:ea typeface="方正大标宋简体" panose="02010601030101010101" pitchFamily="2" charset="-122"/>
+              </a:rPr>
+              <a:t>Make some little test tools </a:t>
+            </a:r>
+            <a:endParaRPr lang="zh-CN" altLang="en-US" sz="3600" b="1" dirty="0">
+              <a:ea typeface="方正大标宋简体" panose="02010601030101010101" pitchFamily="2" charset="-122"/>
+            </a:endParaRPr>
+          </a:p>
+        </p:txBody>
+      </p:sp>
+      <p:sp>
+        <p:nvSpPr>
+          <p:cNvPr id="3" name="内容占位符 2">
+            <a:extLst>
+              <a:ext uri="{FF2B5EF4-FFF2-40B4-BE49-F238E27FC236}">
+                <a16:creationId xmlns:a16="http://schemas.microsoft.com/office/drawing/2014/main" id="{44798EC1-CD57-E6A2-A348-B87170AF78F4}"/>
+              </a:ext>
+            </a:extLst>
+          </p:cNvPr>
+          <p:cNvSpPr>
+            <a:spLocks noGrp="1"/>
+          </p:cNvSpPr>
+          <p:nvPr>
+            <p:ph idx="1"/>
+          </p:nvPr>
+        </p:nvSpPr>
+        <p:spPr>
+          <a:xfrm>
+            <a:off x="837447" y="945264"/>
+            <a:ext cx="7350589" cy="5479287"/>
+          </a:xfrm>
+        </p:spPr>
+        <p:txBody>
+          <a:bodyPr>
+            <a:noAutofit/>
+          </a:bodyPr>
+          <a:lstStyle/>
+          <a:p>
+            <a:pPr marL="0" indent="0">
+              <a:lnSpc>
+                <a:spcPct val="150000"/>
+              </a:lnSpc>
+              <a:buNone/>
+            </a:pPr>
+            <a:r>
+              <a:rPr lang="en-US" altLang="zh-CN" sz="2400" dirty="0">
+                <a:latin typeface="Times New Roman" panose="02020603050405020304" pitchFamily="18" charset="0"/>
+                <a:cs typeface="Times New Roman" panose="02020603050405020304" pitchFamily="18" charset="0"/>
+              </a:rPr>
+              <a:t>We made some tools to </a:t>
+            </a:r>
+            <a:r>
+              <a:rPr lang="en-US" altLang="zh-CN" sz="2400" b="1" dirty="0">
+                <a:solidFill>
+                  <a:srgbClr val="009A9A"/>
+                </a:solidFill>
+                <a:latin typeface="Times New Roman" panose="02020603050405020304" pitchFamily="18" charset="0"/>
+                <a:cs typeface="Times New Roman" panose="02020603050405020304" pitchFamily="18" charset="0"/>
+              </a:rPr>
+              <a:t>verify the core components</a:t>
+            </a:r>
+            <a:r>
+              <a:rPr lang="en-US" altLang="zh-CN" sz="2400" dirty="0">
+                <a:latin typeface="Times New Roman" panose="02020603050405020304" pitchFamily="18" charset="0"/>
+                <a:cs typeface="Times New Roman" panose="02020603050405020304" pitchFamily="18" charset="0"/>
+              </a:rPr>
+              <a:t> of </a:t>
+            </a:r>
+            <a:r>
+              <a:rPr lang="en-US" altLang="zh-CN" sz="2400" i="1" dirty="0">
+                <a:latin typeface="Times New Roman" panose="02020603050405020304" pitchFamily="18" charset="0"/>
+                <a:cs typeface="Times New Roman" panose="02020603050405020304" pitchFamily="18" charset="0"/>
+              </a:rPr>
+              <a:t>Lucky Server </a:t>
+            </a:r>
+            <a:r>
+              <a:rPr lang="en-US" altLang="zh-CN" sz="2400" dirty="0">
+                <a:latin typeface="Times New Roman" panose="02020603050405020304" pitchFamily="18" charset="0"/>
+                <a:cs typeface="Times New Roman" panose="02020603050405020304" pitchFamily="18" charset="0"/>
+              </a:rPr>
+              <a:t>during development.</a:t>
+            </a:r>
+          </a:p>
+          <a:p>
+            <a:pPr>
+              <a:lnSpc>
+                <a:spcPct val="150000"/>
+              </a:lnSpc>
+            </a:pPr>
+            <a:r>
+              <a:rPr lang="en-US" altLang="zh-CN" sz="2400" b="1" i="1" dirty="0" err="1">
+                <a:latin typeface="Times New Roman" panose="02020603050405020304" pitchFamily="18" charset="0"/>
+                <a:cs typeface="Times New Roman" panose="02020603050405020304" pitchFamily="18" charset="0"/>
+              </a:rPr>
+              <a:t>Echo_server</a:t>
+            </a:r>
+            <a:r>
+              <a:rPr lang="en-US" altLang="zh-CN" sz="2400" b="1" i="1" dirty="0">
+                <a:latin typeface="Times New Roman" panose="02020603050405020304" pitchFamily="18" charset="0"/>
+                <a:cs typeface="Times New Roman" panose="02020603050405020304" pitchFamily="18" charset="0"/>
+              </a:rPr>
+              <a:t> &amp; </a:t>
+            </a:r>
+            <a:r>
+              <a:rPr lang="en-US" altLang="zh-CN" sz="2400" b="1" i="1" dirty="0" err="1">
+                <a:latin typeface="Times New Roman" panose="02020603050405020304" pitchFamily="18" charset="0"/>
+                <a:cs typeface="Times New Roman" panose="02020603050405020304" pitchFamily="18" charset="0"/>
+              </a:rPr>
+              <a:t>Single_client</a:t>
+            </a:r>
+            <a:r>
+              <a:rPr lang="en-US" altLang="zh-CN" sz="2400" dirty="0">
+                <a:latin typeface="Times New Roman" panose="02020603050405020304" pitchFamily="18" charset="0"/>
+                <a:cs typeface="Times New Roman" panose="02020603050405020304" pitchFamily="18" charset="0"/>
+              </a:rPr>
+              <a:t>: Can we </a:t>
+            </a:r>
+            <a:r>
+              <a:rPr lang="en-US" altLang="zh-CN" sz="2400" b="1" dirty="0">
+                <a:solidFill>
+                  <a:srgbClr val="009A9A"/>
+                </a:solidFill>
+                <a:latin typeface="Times New Roman" panose="02020603050405020304" pitchFamily="18" charset="0"/>
+                <a:cs typeface="Times New Roman" panose="02020603050405020304" pitchFamily="18" charset="0"/>
+              </a:rPr>
+              <a:t>build the connection</a:t>
+            </a:r>
+            <a:r>
+              <a:rPr lang="en-US" altLang="zh-CN" sz="2400" dirty="0">
+                <a:latin typeface="Times New Roman" panose="02020603050405020304" pitchFamily="18" charset="0"/>
+                <a:cs typeface="Times New Roman" panose="02020603050405020304" pitchFamily="18" charset="0"/>
+              </a:rPr>
+              <a:t> between our server and a client?</a:t>
+            </a:r>
+          </a:p>
+          <a:p>
+            <a:pPr>
+              <a:lnSpc>
+                <a:spcPct val="150000"/>
+              </a:lnSpc>
+            </a:pPr>
+            <a:r>
+              <a:rPr lang="en-US" altLang="zh-CN" sz="2400" b="1" i="1" dirty="0" err="1">
+                <a:latin typeface="Times New Roman" panose="02020603050405020304" pitchFamily="18" charset="0"/>
+                <a:cs typeface="Times New Roman" panose="02020603050405020304" pitchFamily="18" charset="0"/>
+              </a:rPr>
+              <a:t>Test_thread_pool</a:t>
+            </a:r>
+            <a:r>
+              <a:rPr lang="en-US" altLang="zh-CN" sz="2400" dirty="0">
+                <a:latin typeface="Times New Roman" panose="02020603050405020304" pitchFamily="18" charset="0"/>
+                <a:cs typeface="Times New Roman" panose="02020603050405020304" pitchFamily="18" charset="0"/>
+              </a:rPr>
+              <a:t>: Can our </a:t>
+            </a:r>
+            <a:r>
+              <a:rPr lang="en-US" altLang="zh-CN" sz="2400" b="1" dirty="0">
+                <a:solidFill>
+                  <a:srgbClr val="009A9A"/>
+                </a:solidFill>
+                <a:latin typeface="Times New Roman" panose="02020603050405020304" pitchFamily="18" charset="0"/>
+                <a:cs typeface="Times New Roman" panose="02020603050405020304" pitchFamily="18" charset="0"/>
+              </a:rPr>
+              <a:t>thread pool</a:t>
+            </a:r>
+            <a:r>
+              <a:rPr lang="en-US" altLang="zh-CN" sz="2400" dirty="0">
+                <a:latin typeface="Times New Roman" panose="02020603050405020304" pitchFamily="18" charset="0"/>
+                <a:cs typeface="Times New Roman" panose="02020603050405020304" pitchFamily="18" charset="0"/>
+              </a:rPr>
+              <a:t> work correctly? It’s the base of Reactor Pattern!</a:t>
+            </a:r>
+          </a:p>
+          <a:p>
+            <a:pPr>
+              <a:lnSpc>
+                <a:spcPct val="150000"/>
+              </a:lnSpc>
+            </a:pPr>
+            <a:r>
+              <a:rPr lang="en-US" altLang="zh-CN" sz="2400" b="1" i="1" dirty="0" err="1">
+                <a:latin typeface="Times New Roman" panose="02020603050405020304" pitchFamily="18" charset="0"/>
+                <a:cs typeface="Times New Roman" panose="02020603050405020304" pitchFamily="18" charset="0"/>
+              </a:rPr>
+              <a:t>Multiply_Client</a:t>
+            </a:r>
+            <a:r>
+              <a:rPr lang="en-US" altLang="zh-CN" sz="2400" dirty="0">
+                <a:latin typeface="Times New Roman" panose="02020603050405020304" pitchFamily="18" charset="0"/>
+                <a:cs typeface="Times New Roman" panose="02020603050405020304" pitchFamily="18" charset="0"/>
+              </a:rPr>
+              <a:t>: Can our server </a:t>
+            </a:r>
+            <a:r>
+              <a:rPr lang="en-US" altLang="zh-CN" sz="2400" b="1" dirty="0">
+                <a:solidFill>
+                  <a:srgbClr val="009A9A"/>
+                </a:solidFill>
+                <a:latin typeface="Times New Roman" panose="02020603050405020304" pitchFamily="18" charset="0"/>
+                <a:cs typeface="Times New Roman" panose="02020603050405020304" pitchFamily="18" charset="0"/>
+              </a:rPr>
+              <a:t>build connections with a plurality of clients</a:t>
+            </a:r>
+            <a:r>
+              <a:rPr lang="en-US" altLang="zh-CN" sz="2400" dirty="0">
+                <a:latin typeface="Times New Roman" panose="02020603050405020304" pitchFamily="18" charset="0"/>
+                <a:cs typeface="Times New Roman" panose="02020603050405020304" pitchFamily="18" charset="0"/>
+              </a:rPr>
+              <a:t> at the same time?</a:t>
+            </a:r>
+          </a:p>
+        </p:txBody>
+      </p:sp>
+      <p:pic>
+        <p:nvPicPr>
+          <p:cNvPr id="6" name="图片 5">
+            <a:extLst>
+              <a:ext uri="{FF2B5EF4-FFF2-40B4-BE49-F238E27FC236}">
+                <a16:creationId xmlns:a16="http://schemas.microsoft.com/office/drawing/2014/main" id="{AF780697-E0DA-4E49-BB4D-01040C7170E4}"/>
+              </a:ext>
+            </a:extLst>
+          </p:cNvPr>
+          <p:cNvPicPr>
+            <a:picLocks noChangeAspect="1"/>
+          </p:cNvPicPr>
+          <p:nvPr/>
+        </p:nvPicPr>
+        <p:blipFill>
+          <a:blip r:embed="rId2"/>
+          <a:stretch>
+            <a:fillRect/>
+          </a:stretch>
+        </p:blipFill>
+        <p:spPr>
+          <a:xfrm>
+            <a:off x="8633954" y="1516677"/>
+            <a:ext cx="3041469" cy="3824646"/>
+          </a:xfrm>
+          <a:prstGeom prst="rect">
+            <a:avLst/>
+          </a:prstGeom>
+        </p:spPr>
+      </p:pic>
+      <p:sp>
+        <p:nvSpPr>
+          <p:cNvPr id="7" name="矩形 6">
+            <a:extLst>
+              <a:ext uri="{FF2B5EF4-FFF2-40B4-BE49-F238E27FC236}">
+                <a16:creationId xmlns:a16="http://schemas.microsoft.com/office/drawing/2014/main" id="{489C5CA5-59BB-46B5-A589-1B0A19AC450A}"/>
+              </a:ext>
+            </a:extLst>
+          </p:cNvPr>
+          <p:cNvSpPr/>
+          <p:nvPr/>
+        </p:nvSpPr>
+        <p:spPr>
+          <a:xfrm>
+            <a:off x="8959932" y="3010395"/>
+            <a:ext cx="1520042" cy="255319"/>
+          </a:xfrm>
+          <a:prstGeom prst="rect">
+            <a:avLst/>
+          </a:prstGeom>
+          <a:noFill/>
+          <a:ln w="57150">
+            <a:solidFill>
+              <a:srgbClr val="FF0000"/>
+            </a:solidFill>
+          </a:ln>
+        </p:spPr>
+        <p:style>
+          <a:lnRef idx="2">
+            <a:schemeClr val="accent1">
+              <a:shade val="50000"/>
+            </a:schemeClr>
+          </a:lnRef>
+          <a:fillRef idx="1">
+            <a:schemeClr val="accent1"/>
+          </a:fillRef>
+          <a:effectRef idx="0">
+            <a:schemeClr val="accent1"/>
+          </a:effectRef>
+          <a:fontRef idx="minor">
+            <a:schemeClr val="lt1"/>
+          </a:fontRef>
+        </p:style>
+        <p:txBody>
+          <a:bodyPr rtlCol="0" anchor="ctr"/>
+          <a:lstStyle/>
+          <a:p>
+            <a:pPr algn="ctr"/>
+            <a:endParaRPr lang="zh-CN" altLang="en-US"/>
+          </a:p>
+        </p:txBody>
+      </p:sp>
+      <p:sp>
+        <p:nvSpPr>
+          <p:cNvPr id="8" name="矩形 7">
+            <a:extLst>
+              <a:ext uri="{FF2B5EF4-FFF2-40B4-BE49-F238E27FC236}">
+                <a16:creationId xmlns:a16="http://schemas.microsoft.com/office/drawing/2014/main" id="{20CBC278-A270-4467-B9C4-5F4CF6AF0CE4}"/>
+              </a:ext>
+            </a:extLst>
+          </p:cNvPr>
+          <p:cNvSpPr/>
+          <p:nvPr/>
+        </p:nvSpPr>
+        <p:spPr>
+          <a:xfrm>
+            <a:off x="8959931" y="3517572"/>
+            <a:ext cx="1852551" cy="745670"/>
+          </a:xfrm>
+          <a:prstGeom prst="rect">
+            <a:avLst/>
+          </a:prstGeom>
+          <a:noFill/>
+          <a:ln w="57150">
+            <a:solidFill>
+              <a:srgbClr val="FF0000"/>
+            </a:solidFill>
+          </a:ln>
+        </p:spPr>
+        <p:style>
+          <a:lnRef idx="2">
+            <a:schemeClr val="accent1">
+              <a:shade val="50000"/>
+            </a:schemeClr>
+          </a:lnRef>
+          <a:fillRef idx="1">
+            <a:schemeClr val="accent1"/>
+          </a:fillRef>
+          <a:effectRef idx="0">
+            <a:schemeClr val="accent1"/>
+          </a:effectRef>
+          <a:fontRef idx="minor">
+            <a:schemeClr val="lt1"/>
+          </a:fontRef>
+        </p:style>
+        <p:txBody>
+          <a:bodyPr rtlCol="0" anchor="ctr"/>
+          <a:lstStyle/>
+          <a:p>
+            <a:pPr algn="ctr"/>
+            <a:endParaRPr lang="zh-CN" altLang="en-US"/>
+          </a:p>
+        </p:txBody>
+      </p:sp>
+    </p:spTree>
+    <p:extLst>
+      <p:ext uri="{BB962C8B-B14F-4D97-AF65-F5344CB8AC3E}">
+        <p14:creationId xmlns:p14="http://schemas.microsoft.com/office/powerpoint/2010/main" val="1083217657"/>
+      </p:ext>
+    </p:extLst>
+  </p:cSld>
+  <p:clrMapOvr>
+    <a:masterClrMapping/>
+  </p:clrMapOvr>
+</p:sld>
+</file>
+
+<file path=ppt/slides/slide8.xml><?xml version="1.0" encoding="utf-8"?>
+<p:sld xmlns:a="http://schemas.openxmlformats.org/drawingml/2006/main" xmlns:r="http://schemas.openxmlformats.org/officeDocument/2006/relationships" xmlns:p="http://schemas.openxmlformats.org/presentationml/2006/main">
+  <p:cSld>
+    <p:spTree>
+      <p:nvGrpSpPr>
+        <p:cNvPr id="1" name="">
+          <a:extLst>
+            <a:ext uri="{FF2B5EF4-FFF2-40B4-BE49-F238E27FC236}">
+              <a16:creationId xmlns:a16="http://schemas.microsoft.com/office/drawing/2014/main" id="{9D6EC837-7D92-5E3B-9E37-0551E274E106}"/>
+            </a:ext>
+          </a:extLst>
+        </p:cNvPr>
+        <p:cNvGrpSpPr/>
+        <p:nvPr/>
+      </p:nvGrpSpPr>
+      <p:grpSpPr>
+        <a:xfrm>
+          <a:off x="0" y="0"/>
+          <a:ext cx="0" cy="0"/>
+          <a:chOff x="0" y="0"/>
+          <a:chExt cx="0" cy="0"/>
+        </a:xfrm>
+      </p:grpSpPr>
+      <p:sp>
+        <p:nvSpPr>
+          <p:cNvPr id="2" name="标题 1">
+            <a:extLst>
+              <a:ext uri="{FF2B5EF4-FFF2-40B4-BE49-F238E27FC236}">
+                <a16:creationId xmlns:a16="http://schemas.microsoft.com/office/drawing/2014/main" id="{CB6C0A98-F5E6-9532-24E2-F0C1EF59936F}"/>
+              </a:ext>
+            </a:extLst>
+          </p:cNvPr>
+          <p:cNvSpPr>
+            <a:spLocks noGrp="1"/>
+          </p:cNvSpPr>
+          <p:nvPr>
+            <p:ph type="title"/>
+          </p:nvPr>
+        </p:nvSpPr>
+        <p:spPr>
+          <a:xfrm>
+            <a:off x="838951" y="-142137"/>
+            <a:ext cx="11071999" cy="1325563"/>
+          </a:xfrm>
+        </p:spPr>
+        <p:txBody>
+          <a:bodyPr>
+            <a:normAutofit/>
+          </a:bodyPr>
+          <a:lstStyle/>
+          <a:p>
+            <a:r>
+              <a:rPr lang="en-US" altLang="zh-CN" sz="3600" b="1" dirty="0">
+                <a:latin typeface="Times New Roman" panose="02020603050405020304" pitchFamily="18" charset="0"/>
+                <a:cs typeface="Times New Roman" panose="02020603050405020304" pitchFamily="18" charset="0"/>
+              </a:rPr>
+              <a:t>Engineering: </a:t>
+            </a:r>
+            <a:r>
+              <a:rPr lang="en-US" altLang="zh-CN" sz="3600" b="1" dirty="0">
+                <a:latin typeface="方正大标宋简体" panose="02010601030101010101" pitchFamily="2" charset="-122"/>
+                <a:ea typeface="方正大标宋简体" panose="02010601030101010101" pitchFamily="2" charset="-122"/>
+              </a:rPr>
+              <a:t>Project Progress Management</a:t>
+            </a:r>
+            <a:endParaRPr lang="zh-CN" altLang="en-US" sz="3600" b="1" dirty="0">
+              <a:ea typeface="方正大标宋简体" panose="02010601030101010101" pitchFamily="2" charset="-122"/>
+            </a:endParaRPr>
+          </a:p>
+        </p:txBody>
+      </p:sp>
+      <p:sp>
+        <p:nvSpPr>
+          <p:cNvPr id="3" name="内容占位符 2">
+            <a:extLst>
+              <a:ext uri="{FF2B5EF4-FFF2-40B4-BE49-F238E27FC236}">
+                <a16:creationId xmlns:a16="http://schemas.microsoft.com/office/drawing/2014/main" id="{44798EC1-CD57-E6A2-A348-B87170AF78F4}"/>
+              </a:ext>
+            </a:extLst>
+          </p:cNvPr>
+          <p:cNvSpPr>
+            <a:spLocks noGrp="1"/>
+          </p:cNvSpPr>
+          <p:nvPr>
+            <p:ph idx="1"/>
+          </p:nvPr>
+        </p:nvSpPr>
+        <p:spPr>
+          <a:xfrm>
+            <a:off x="893292" y="945264"/>
+            <a:ext cx="10752117" cy="3637024"/>
+          </a:xfrm>
+        </p:spPr>
+        <p:txBody>
+          <a:bodyPr>
+            <a:noAutofit/>
+          </a:bodyPr>
+          <a:lstStyle/>
+          <a:p>
+            <a:pPr>
+              <a:lnSpc>
+                <a:spcPct val="150000"/>
+              </a:lnSpc>
+            </a:pPr>
+            <a:r>
+              <a:rPr lang="en-US" altLang="zh-CN" sz="3200" dirty="0">
+                <a:latin typeface="Times New Roman" panose="02020603050405020304" pitchFamily="18" charset="0"/>
+                <a:cs typeface="Times New Roman" panose="02020603050405020304" pitchFamily="18" charset="0"/>
+              </a:rPr>
+              <a:t>Managing Project Progress with </a:t>
+            </a:r>
+            <a:r>
+              <a:rPr lang="en-US" altLang="zh-CN" sz="3200" b="1" dirty="0">
+                <a:solidFill>
+                  <a:srgbClr val="009A9A"/>
+                </a:solidFill>
+                <a:latin typeface="Times New Roman" panose="02020603050405020304" pitchFamily="18" charset="0"/>
+                <a:cs typeface="Times New Roman" panose="02020603050405020304" pitchFamily="18" charset="0"/>
+              </a:rPr>
+              <a:t>Git</a:t>
+            </a:r>
+          </a:p>
+          <a:p>
+            <a:pPr lvl="1">
+              <a:lnSpc>
+                <a:spcPct val="150000"/>
+              </a:lnSpc>
+            </a:pPr>
+            <a:r>
+              <a:rPr lang="en-US" altLang="zh-CN" sz="2800" dirty="0">
+                <a:latin typeface="Times New Roman" panose="02020603050405020304" pitchFamily="18" charset="0"/>
+                <a:cs typeface="Times New Roman" panose="02020603050405020304" pitchFamily="18" charset="0"/>
+              </a:rPr>
+              <a:t>Tracking changes and commits</a:t>
+            </a:r>
+          </a:p>
+          <a:p>
+            <a:pPr lvl="1">
+              <a:lnSpc>
+                <a:spcPct val="150000"/>
+              </a:lnSpc>
+            </a:pPr>
+            <a:r>
+              <a:rPr lang="en-US" altLang="zh-CN" sz="2800" dirty="0">
+                <a:latin typeface="Times New Roman" panose="02020603050405020304" pitchFamily="18" charset="0"/>
+                <a:cs typeface="Times New Roman" panose="02020603050405020304" pitchFamily="18" charset="0"/>
+              </a:rPr>
+              <a:t>Branching and merging strategies</a:t>
+            </a:r>
+          </a:p>
+          <a:p>
+            <a:pPr lvl="1">
+              <a:lnSpc>
+                <a:spcPct val="150000"/>
+              </a:lnSpc>
+            </a:pPr>
+            <a:r>
+              <a:rPr lang="en-US" altLang="zh-CN" sz="2800" dirty="0">
+                <a:latin typeface="Times New Roman" panose="02020603050405020304" pitchFamily="18" charset="0"/>
+                <a:cs typeface="Times New Roman" panose="02020603050405020304" pitchFamily="18" charset="0"/>
+              </a:rPr>
+              <a:t>Collaborating with team members</a:t>
+            </a:r>
+          </a:p>
+          <a:p>
+            <a:pPr marL="457200" lvl="1" indent="0">
+              <a:lnSpc>
+                <a:spcPct val="150000"/>
+              </a:lnSpc>
+              <a:buNone/>
+            </a:pPr>
+            <a:r>
+              <a:rPr lang="en-US" altLang="zh-CN" sz="2800" dirty="0">
+                <a:latin typeface="Times New Roman" panose="02020603050405020304" pitchFamily="18" charset="0"/>
+                <a:cs typeface="Times New Roman" panose="02020603050405020304" pitchFamily="18" charset="0"/>
+              </a:rPr>
+              <a:t>   through pull requests</a:t>
+            </a:r>
+            <a:endParaRPr lang="zh-CN" altLang="en-US" sz="2800" dirty="0">
+              <a:latin typeface="Times New Roman" panose="02020603050405020304" pitchFamily="18" charset="0"/>
+              <a:cs typeface="Times New Roman" panose="02020603050405020304" pitchFamily="18" charset="0"/>
+            </a:endParaRPr>
+          </a:p>
+        </p:txBody>
+      </p:sp>
+      <p:pic>
+        <p:nvPicPr>
+          <p:cNvPr id="5" name="图片 4">
+            <a:extLst>
+              <a:ext uri="{FF2B5EF4-FFF2-40B4-BE49-F238E27FC236}">
+                <a16:creationId xmlns:a16="http://schemas.microsoft.com/office/drawing/2014/main" id="{5AAA5EBF-F1E9-4C27-5D87-5A3AA8B59C99}"/>
+              </a:ext>
+            </a:extLst>
+          </p:cNvPr>
+          <p:cNvPicPr>
+            <a:picLocks noChangeAspect="1"/>
+          </p:cNvPicPr>
+          <p:nvPr/>
+        </p:nvPicPr>
+        <p:blipFill>
+          <a:blip r:embed="rId2"/>
+          <a:stretch>
+            <a:fillRect/>
+          </a:stretch>
+        </p:blipFill>
+        <p:spPr>
+          <a:xfrm>
+            <a:off x="7578165" y="945264"/>
+            <a:ext cx="3465613" cy="5427834"/>
+          </a:xfrm>
+          <a:prstGeom prst="rect">
+            <a:avLst/>
+          </a:prstGeom>
+        </p:spPr>
+      </p:pic>
+    </p:spTree>
+    <p:extLst>
+      <p:ext uri="{BB962C8B-B14F-4D97-AF65-F5344CB8AC3E}">
+        <p14:creationId xmlns:p14="http://schemas.microsoft.com/office/powerpoint/2010/main" val="2609023843"/>
+      </p:ext>
+    </p:extLst>
+  </p:cSld>
+  <p:clrMapOvr>
+    <a:masterClrMapping/>
+  </p:clrMapOvr>
+</p:sld>
+</file>
+
+<file path=ppt/slides/slide9.xml><?xml version="1.0" encoding="utf-8"?>
+<p:sld xmlns:a="http://schemas.openxmlformats.org/drawingml/2006/main" xmlns:r="http://schemas.openxmlformats.org/officeDocument/2006/relationships" xmlns:p="http://schemas.openxmlformats.org/presentationml/2006/main">
+  <p:cSld>
+    <p:spTree>
+      <p:nvGrpSpPr>
+        <p:cNvPr id="1" name="">
+          <a:extLst>
+            <a:ext uri="{FF2B5EF4-FFF2-40B4-BE49-F238E27FC236}">
+              <a16:creationId xmlns:a16="http://schemas.microsoft.com/office/drawing/2014/main" id="{94ACB56B-B2CB-794D-64BC-2A76E2BBD2E5}"/>
+            </a:ext>
+          </a:extLst>
+        </p:cNvPr>
+        <p:cNvGrpSpPr/>
+        <p:nvPr/>
+      </p:nvGrpSpPr>
+      <p:grpSpPr>
+        <a:xfrm>
+          <a:off x="0" y="0"/>
+          <a:ext cx="0" cy="0"/>
+          <a:chOff x="0" y="0"/>
+          <a:chExt cx="0" cy="0"/>
+        </a:xfrm>
+      </p:grpSpPr>
+      <p:pic>
+        <p:nvPicPr>
+          <p:cNvPr id="26" name="图片 25">
+            <a:extLst>
+              <a:ext uri="{FF2B5EF4-FFF2-40B4-BE49-F238E27FC236}">
+                <a16:creationId xmlns:a16="http://schemas.microsoft.com/office/drawing/2014/main" id="{117262B2-ED73-82F1-0059-F2AF360E235C}"/>
+              </a:ext>
+            </a:extLst>
+          </p:cNvPr>
+          <p:cNvPicPr>
+            <a:picLocks noChangeAspect="1"/>
+          </p:cNvPicPr>
+          <p:nvPr/>
+        </p:nvPicPr>
+        <p:blipFill>
+          <a:blip r:embed="rId2"/>
+          <a:stretch>
+            <a:fillRect/>
+          </a:stretch>
+        </p:blipFill>
+        <p:spPr>
+          <a:xfrm>
+            <a:off x="2769906" y="2408549"/>
+            <a:ext cx="5930735" cy="3637024"/>
+          </a:xfrm>
+          <a:prstGeom prst="rect">
+            <a:avLst/>
+          </a:prstGeom>
+        </p:spPr>
+      </p:pic>
+      <p:sp>
+        <p:nvSpPr>
+          <p:cNvPr id="2" name="标题 1">
+            <a:extLst>
+              <a:ext uri="{FF2B5EF4-FFF2-40B4-BE49-F238E27FC236}">
+                <a16:creationId xmlns:a16="http://schemas.microsoft.com/office/drawing/2014/main" id="{60899F4A-E104-FC45-5FE2-07AD8563649E}"/>
+              </a:ext>
+            </a:extLst>
+          </p:cNvPr>
+          <p:cNvSpPr>
+            <a:spLocks noGrp="1"/>
+          </p:cNvSpPr>
+          <p:nvPr>
+            <p:ph type="title"/>
+          </p:nvPr>
+        </p:nvSpPr>
+        <p:spPr>
+          <a:xfrm>
+            <a:off x="838952" y="-142137"/>
+            <a:ext cx="10515600" cy="1325563"/>
+          </a:xfrm>
+        </p:spPr>
+        <p:txBody>
+          <a:bodyPr/>
+          <a:lstStyle/>
+          <a:p>
+            <a:r>
+              <a:rPr lang="en-US" altLang="zh-CN" b="1" dirty="0">
+                <a:latin typeface="方正大标宋简体" panose="02010601030101010101" pitchFamily="2" charset="-122"/>
+                <a:ea typeface="方正大标宋简体" panose="02010601030101010101" pitchFamily="2" charset="-122"/>
+              </a:rPr>
+              <a:t>Code Review: </a:t>
+            </a:r>
+            <a:r>
+              <a:rPr lang="en-US" altLang="zh-CN" sz="4000" b="1" dirty="0">
+                <a:latin typeface="方正大标宋简体" panose="02010601030101010101" pitchFamily="2" charset="-122"/>
+                <a:ea typeface="方正大标宋简体" panose="02010601030101010101" pitchFamily="2" charset="-122"/>
+              </a:rPr>
+              <a:t>Google C++ Style Guide</a:t>
+            </a:r>
+            <a:endParaRPr lang="zh-CN" altLang="en-US" sz="4000" b="1" dirty="0">
+              <a:ea typeface="方正大标宋简体" panose="02010601030101010101" pitchFamily="2" charset="-122"/>
+            </a:endParaRPr>
+          </a:p>
+        </p:txBody>
+      </p:sp>
+      <p:sp>
+        <p:nvSpPr>
+          <p:cNvPr id="3" name="内容占位符 2">
+            <a:extLst>
+              <a:ext uri="{FF2B5EF4-FFF2-40B4-BE49-F238E27FC236}">
+                <a16:creationId xmlns:a16="http://schemas.microsoft.com/office/drawing/2014/main" id="{30F26D4B-7952-370A-39B5-CE28636F33B3}"/>
+              </a:ext>
+            </a:extLst>
+          </p:cNvPr>
+          <p:cNvSpPr>
+            <a:spLocks noGrp="1"/>
+          </p:cNvSpPr>
+          <p:nvPr>
+            <p:ph idx="1"/>
+          </p:nvPr>
+        </p:nvSpPr>
+        <p:spPr>
+          <a:xfrm>
+            <a:off x="893292" y="945264"/>
+            <a:ext cx="10752117" cy="3637024"/>
+          </a:xfrm>
+        </p:spPr>
+        <p:txBody>
+          <a:bodyPr/>
+          <a:lstStyle/>
+          <a:p>
+            <a:r>
+              <a:rPr lang="en-US" altLang="zh-CN" dirty="0">
+                <a:latin typeface="Times New Roman" panose="02020603050405020304" pitchFamily="18" charset="0"/>
+                <a:cs typeface="Times New Roman" panose="02020603050405020304" pitchFamily="18" charset="0"/>
+              </a:rPr>
+              <a:t>Header Files and Scoping</a:t>
+            </a:r>
+          </a:p>
+          <a:p>
+            <a:r>
+              <a:rPr lang="en-US" altLang="zh-CN" dirty="0">
+                <a:latin typeface="Times New Roman" panose="02020603050405020304" pitchFamily="18" charset="0"/>
+                <a:cs typeface="Times New Roman" panose="02020603050405020304" pitchFamily="18" charset="0"/>
+              </a:rPr>
+              <a:t>Class Design and Function Best Practices</a:t>
+            </a:r>
+          </a:p>
+          <a:p>
+            <a:r>
+              <a:rPr lang="en-US" altLang="zh-CN" dirty="0">
+                <a:latin typeface="Times New Roman" panose="02020603050405020304" pitchFamily="18" charset="0"/>
+                <a:cs typeface="Times New Roman" panose="02020603050405020304" pitchFamily="18" charset="0"/>
+              </a:rPr>
+              <a:t>Naming, Commenting, and Formatting Guidelines</a:t>
+            </a:r>
+            <a:endParaRPr lang="zh-CN" altLang="en-US" dirty="0">
+              <a:latin typeface="Times New Roman" panose="02020603050405020304" pitchFamily="18" charset="0"/>
+              <a:cs typeface="Times New Roman" panose="02020603050405020304" pitchFamily="18" charset="0"/>
+            </a:endParaRPr>
+          </a:p>
+        </p:txBody>
+      </p:sp>
+      <p:sp>
+        <p:nvSpPr>
+          <p:cNvPr id="5" name="文本框 4">
+            <a:extLst>
+              <a:ext uri="{FF2B5EF4-FFF2-40B4-BE49-F238E27FC236}">
+                <a16:creationId xmlns:a16="http://schemas.microsoft.com/office/drawing/2014/main" id="{011AB205-0EB2-4DFF-9C98-8BBC428DE5C1}"/>
+              </a:ext>
+            </a:extLst>
+          </p:cNvPr>
+          <p:cNvSpPr txBox="1"/>
+          <p:nvPr/>
+        </p:nvSpPr>
+        <p:spPr>
+          <a:xfrm>
+            <a:off x="794633" y="6368597"/>
+            <a:ext cx="9881283" cy="400110"/>
+          </a:xfrm>
+          <a:prstGeom prst="rect">
+            <a:avLst/>
+          </a:prstGeom>
+          <a:noFill/>
+        </p:spPr>
+        <p:txBody>
+          <a:bodyPr wrap="square" rtlCol="0">
+            <a:spAutoFit/>
+          </a:bodyPr>
+          <a:lstStyle/>
+          <a:p>
+            <a:r>
+              <a:rPr lang="en-US" altLang="zh-CN" sz="2000" i="1" dirty="0">
+                <a:latin typeface="Times New Roman" panose="02020603050405020304" pitchFamily="18" charset="0"/>
+                <a:cs typeface="Times New Roman" panose="02020603050405020304" pitchFamily="18" charset="0"/>
+              </a:rPr>
+              <a:t>* Please refer to https://www.yiyibooks.cn/yiyibooks/Google_CPP_Style_Guide/index.html</a:t>
+            </a:r>
+            <a:endParaRPr lang="zh-CN" altLang="en-US" sz="2000" i="1" dirty="0">
+              <a:latin typeface="Times New Roman" panose="02020603050405020304" pitchFamily="18" charset="0"/>
+              <a:cs typeface="Times New Roman" panose="02020603050405020304" pitchFamily="18" charset="0"/>
+            </a:endParaRPr>
+          </a:p>
+        </p:txBody>
+      </p:sp>
+    </p:spTree>
+    <p:extLst>
+      <p:ext uri="{BB962C8B-B14F-4D97-AF65-F5344CB8AC3E}">
+        <p14:creationId xmlns:p14="http://schemas.microsoft.com/office/powerpoint/2010/main" val="76980153"/>
       </p:ext>
     </p:extLst>
   </p:cSld>

--- a/docs/LuckyServer.pptx
+++ b/docs/LuckyServer.pptx
@@ -4179,7 +4179,7 @@
         <p:spPr>
           <a:xfrm>
             <a:off x="5444339" y="1843881"/>
-            <a:ext cx="5909461" cy="3970318"/>
+            <a:ext cx="5979723" cy="3693319"/>
           </a:xfrm>
           <a:prstGeom prst="rect">
             <a:avLst/>
@@ -4469,43 +4469,7 @@
                 </a:solidFill>
                 <a:latin typeface="Consolas" panose="020B0609020204030204" pitchFamily="49" charset="0"/>
               </a:rPr>
-              <a:t>, &amp;</a:t>
-            </a:r>
-            <a:r>
-              <a:rPr lang="en-US" altLang="zh-CN" b="1" dirty="0" err="1">
-                <a:solidFill>
-                  <a:srgbClr val="FF0000"/>
-                </a:solidFill>
-                <a:latin typeface="Consolas" panose="020B0609020204030204" pitchFamily="49" charset="0"/>
-              </a:rPr>
-              <a:t>clientaddr</a:t>
-            </a:r>
-            <a:r>
-              <a:rPr lang="en-US" altLang="zh-CN" b="1" dirty="0">
-                <a:solidFill>
-                  <a:srgbClr val="FF0000"/>
-                </a:solidFill>
-                <a:latin typeface="Consolas" panose="020B0609020204030204" pitchFamily="49" charset="0"/>
-              </a:rPr>
-              <a:t>, &amp;</a:t>
-            </a:r>
-            <a:r>
-              <a:rPr lang="en-US" altLang="zh-CN" b="1" dirty="0" err="1">
-                <a:solidFill>
-                  <a:srgbClr val="FF0000"/>
-                </a:solidFill>
-                <a:latin typeface="Consolas" panose="020B0609020204030204" pitchFamily="49" charset="0"/>
-              </a:rPr>
-              <a:t>clientlen</a:t>
-            </a:r>
-            <a:r>
-              <a:rPr lang="en-US" altLang="zh-CN" b="1" dirty="0">
-                <a:solidFill>
-                  <a:srgbClr val="FF0000"/>
-                </a:solidFill>
-                <a:latin typeface="Consolas" panose="020B0609020204030204" pitchFamily="49" charset="0"/>
-              </a:rPr>
-              <a:t>); 	</a:t>
+              <a:t>, ...); 	</a:t>
             </a:r>
           </a:p>
           <a:p>
@@ -4640,6 +4604,55 @@
               <a:latin typeface="Consolas" panose="020B0609020204030204" pitchFamily="49" charset="0"/>
               <a:cs typeface="Times New Roman" panose="02020603050405020304" pitchFamily="18" charset="0"/>
             </a:endParaRPr>
+          </a:p>
+        </p:txBody>
+      </p:sp>
+      <p:sp>
+        <p:nvSpPr>
+          <p:cNvPr id="8" name="左大括号 7">
+            <a:extLst>
+              <a:ext uri="{FF2B5EF4-FFF2-40B4-BE49-F238E27FC236}">
+                <a16:creationId xmlns:a16="http://schemas.microsoft.com/office/drawing/2014/main" id="{761FBF0F-A5FB-439D-B8D1-4E082C61C75F}"/>
+              </a:ext>
+            </a:extLst>
+          </p:cNvPr>
+          <p:cNvSpPr/>
+          <p:nvPr/>
+        </p:nvSpPr>
+        <p:spPr>
+          <a:xfrm>
+            <a:off x="5622965" y="3627912"/>
+            <a:ext cx="332510" cy="1448789"/>
+          </a:xfrm>
+          <a:prstGeom prst="leftBrace">
+            <a:avLst/>
+          </a:prstGeom>
+          <a:ln w="38100">
+            <a:solidFill>
+              <a:srgbClr val="FF0000"/>
+            </a:solidFill>
+          </a:ln>
+        </p:spPr>
+        <p:style>
+          <a:lnRef idx="1">
+            <a:schemeClr val="accent1"/>
+          </a:lnRef>
+          <a:fillRef idx="0">
+            <a:schemeClr val="accent1"/>
+          </a:fillRef>
+          <a:effectRef idx="0">
+            <a:schemeClr val="accent1"/>
+          </a:effectRef>
+          <a:fontRef idx="minor">
+            <a:schemeClr val="tx1"/>
+          </a:fontRef>
+        </p:style>
+        <p:txBody>
+          <a:bodyPr rtlCol="0" anchor="ctr"/>
+          <a:lstStyle/>
+          <a:p>
+            <a:pPr algn="ctr"/>
+            <a:endParaRPr lang="zh-CN" altLang="en-US"/>
           </a:p>
         </p:txBody>
       </p:sp>
